--- a/presentations/FIELD BOOKING SYSTEM (phase 1).pptx
+++ b/presentations/FIELD BOOKING SYSTEM (phase 1).pptx
@@ -1,28 +1,28 @@
 
 <file path=ppt/presentation.xml><?xml version="1.0" encoding="utf-8"?>
-<p:presentation xmlns:a="http://schemas.openxmlformats.org/drawingml/2006/main" xmlns:r="http://schemas.openxmlformats.org/officeDocument/2006/relationships" xmlns:p="http://schemas.openxmlformats.org/presentationml/2006/main" saveSubsetFonts="1" embedTrueTypeFonts="true">
+<p:presentation xmlns:a="http://schemas.openxmlformats.org/drawingml/2006/main" xmlns:r="http://schemas.openxmlformats.org/officeDocument/2006/relationships" xmlns:p="http://schemas.openxmlformats.org/presentationml/2006/main" embedTrueTypeFonts="1" saveSubsetFonts="1">
   <p:sldMasterIdLst>
     <p:sldMasterId id="2147483648" r:id="rId1"/>
   </p:sldMasterIdLst>
   <p:sldIdLst>
-    <p:sldId id="256" r:id="rId6"/>
-    <p:sldId id="257" r:id="rId7"/>
-    <p:sldId id="258" r:id="rId8"/>
+    <p:sldId id="256" r:id="rId2"/>
+    <p:sldId id="257" r:id="rId3"/>
+    <p:sldId id="258" r:id="rId4"/>
   </p:sldIdLst>
   <p:sldSz cx="18288000" cy="10287000"/>
   <p:notesSz cx="6858000" cy="9144000"/>
   <p:embeddedFontLst>
     <p:embeddedFont>
-      <p:font typeface="Lastica" charset="1" panose="02000500000000000000"/>
-      <p:regular r:id="rId9"/>
+      <p:font typeface="Lastica" panose="020B0604020202020204" charset="0"/>
+      <p:regular r:id="rId5"/>
     </p:embeddedFont>
     <p:embeddedFont>
-      <p:font typeface="Poppins" charset="1" panose="00000500000000000000"/>
-      <p:regular r:id="rId10"/>
+      <p:font typeface="Poppins" panose="00000500000000000000" pitchFamily="2" charset="0"/>
+      <p:regular r:id="rId6"/>
     </p:embeddedFont>
     <p:embeddedFont>
-      <p:font typeface="Poppins Bold" charset="1" panose="00000800000000000000"/>
-      <p:regular r:id="rId11"/>
+      <p:font typeface="Poppins Bold" panose="00000800000000000000" charset="0"/>
+      <p:regular r:id="rId7"/>
     </p:embeddedFont>
   </p:embeddedFontLst>
   <p:defaultTextStyle>
@@ -120,6 +120,22 @@
       </a:defRPr>
     </a:lvl9pPr>
   </p:defaultTextStyle>
+  <p:extLst>
+    <p:ext uri="{EFAFB233-063F-42B5-8137-9DF3F51BA10A}">
+      <p15:sldGuideLst xmlns:p15="http://schemas.microsoft.com/office/powerpoint/2012/main">
+        <p15:guide id="1" orient="horz" pos="2160">
+          <p15:clr>
+            <a:srgbClr val="A4A3A4"/>
+          </p15:clr>
+        </p15:guide>
+        <p15:guide id="2" pos="2880">
+          <p15:clr>
+            <a:srgbClr val="A4A3A4"/>
+          </p15:clr>
+        </p15:guide>
+      </p15:sldGuideLst>
+    </p:ext>
+  </p:extLst>
 </p:presentation>
 </file>
 
@@ -161,10 +177,9 @@
           <a:lstStyle/>
           <a:p>
             <a:r>
-              <a:rPr lang="en-US" smtClean="0"/>
+              <a:rPr lang="en-US"/>
               <a:t>Click to edit Master title style</a:t>
             </a:r>
-            <a:endParaRPr lang="en-US"/>
           </a:p>
         </p:txBody>
       </p:sp>
@@ -280,10 +295,9 @@
           </a:lstStyle>
           <a:p>
             <a:r>
-              <a:rPr lang="en-US" smtClean="0"/>
+              <a:rPr lang="en-US"/>
               <a:t>Click to edit Master subtitle style</a:t>
             </a:r>
-            <a:endParaRPr lang="en-US"/>
           </a:p>
         </p:txBody>
       </p:sp>
@@ -305,7 +319,7 @@
             <a:fld id="{1D8BD707-D9CF-40AE-B4C6-C98DA3205C09}" type="datetimeFigureOut">
               <a:rPr lang="en-US" smtClean="0"/>
               <a:pPr/>
-              <a:t>8/1/2011</a:t>
+              <a:t>2/5/2026</a:t>
             </a:fld>
             <a:endParaRPr lang="en-US"/>
           </a:p>
@@ -395,10 +409,9 @@
           <a:lstStyle/>
           <a:p>
             <a:r>
-              <a:rPr lang="en-US" smtClean="0"/>
+              <a:rPr lang="en-US"/>
               <a:t>Click to edit Master title style</a:t>
             </a:r>
-            <a:endParaRPr lang="en-US"/>
           </a:p>
         </p:txBody>
       </p:sp>
@@ -419,38 +432,37 @@
           <a:p>
             <a:pPr lvl="0"/>
             <a:r>
-              <a:rPr lang="en-US" smtClean="0"/>
+              <a:rPr lang="en-US"/>
               <a:t>Click to edit Master text styles</a:t>
             </a:r>
           </a:p>
           <a:p>
             <a:pPr lvl="1"/>
             <a:r>
-              <a:rPr lang="en-US" smtClean="0"/>
+              <a:rPr lang="en-US"/>
               <a:t>Second level</a:t>
             </a:r>
           </a:p>
           <a:p>
             <a:pPr lvl="2"/>
             <a:r>
-              <a:rPr lang="en-US" smtClean="0"/>
+              <a:rPr lang="en-US"/>
               <a:t>Third level</a:t>
             </a:r>
           </a:p>
           <a:p>
             <a:pPr lvl="3"/>
             <a:r>
-              <a:rPr lang="en-US" smtClean="0"/>
+              <a:rPr lang="en-US"/>
               <a:t>Fourth level</a:t>
             </a:r>
           </a:p>
           <a:p>
             <a:pPr lvl="4"/>
             <a:r>
-              <a:rPr lang="en-US" smtClean="0"/>
+              <a:rPr lang="en-US"/>
               <a:t>Fifth level</a:t>
             </a:r>
-            <a:endParaRPr lang="en-US"/>
           </a:p>
         </p:txBody>
       </p:sp>
@@ -472,7 +484,7 @@
             <a:fld id="{1D8BD707-D9CF-40AE-B4C6-C98DA3205C09}" type="datetimeFigureOut">
               <a:rPr lang="en-US" smtClean="0"/>
               <a:pPr/>
-              <a:t>8/1/2011</a:t>
+              <a:t>2/5/2026</a:t>
             </a:fld>
             <a:endParaRPr lang="en-US"/>
           </a:p>
@@ -567,10 +579,9 @@
           <a:lstStyle/>
           <a:p>
             <a:r>
-              <a:rPr lang="en-US" smtClean="0"/>
+              <a:rPr lang="en-US"/>
               <a:t>Click to edit Master title style</a:t>
             </a:r>
-            <a:endParaRPr lang="en-US"/>
           </a:p>
         </p:txBody>
       </p:sp>
@@ -596,38 +607,37 @@
           <a:p>
             <a:pPr lvl="0"/>
             <a:r>
-              <a:rPr lang="en-US" smtClean="0"/>
+              <a:rPr lang="en-US"/>
               <a:t>Click to edit Master text styles</a:t>
             </a:r>
           </a:p>
           <a:p>
             <a:pPr lvl="1"/>
             <a:r>
-              <a:rPr lang="en-US" smtClean="0"/>
+              <a:rPr lang="en-US"/>
               <a:t>Second level</a:t>
             </a:r>
           </a:p>
           <a:p>
             <a:pPr lvl="2"/>
             <a:r>
-              <a:rPr lang="en-US" smtClean="0"/>
+              <a:rPr lang="en-US"/>
               <a:t>Third level</a:t>
             </a:r>
           </a:p>
           <a:p>
             <a:pPr lvl="3"/>
             <a:r>
-              <a:rPr lang="en-US" smtClean="0"/>
+              <a:rPr lang="en-US"/>
               <a:t>Fourth level</a:t>
             </a:r>
           </a:p>
           <a:p>
             <a:pPr lvl="4"/>
             <a:r>
-              <a:rPr lang="en-US" smtClean="0"/>
+              <a:rPr lang="en-US"/>
               <a:t>Fifth level</a:t>
             </a:r>
-            <a:endParaRPr lang="en-US"/>
           </a:p>
         </p:txBody>
       </p:sp>
@@ -649,7 +659,7 @@
             <a:fld id="{1D8BD707-D9CF-40AE-B4C6-C98DA3205C09}" type="datetimeFigureOut">
               <a:rPr lang="en-US" smtClean="0"/>
               <a:pPr/>
-              <a:t>8/1/2011</a:t>
+              <a:t>2/5/2026</a:t>
             </a:fld>
             <a:endParaRPr lang="en-US"/>
           </a:p>
@@ -739,10 +749,9 @@
           <a:lstStyle/>
           <a:p>
             <a:r>
-              <a:rPr lang="en-US" smtClean="0"/>
+              <a:rPr lang="en-US"/>
               <a:t>Click to edit Master title style</a:t>
             </a:r>
-            <a:endParaRPr lang="en-US"/>
           </a:p>
         </p:txBody>
       </p:sp>
@@ -763,38 +772,37 @@
           <a:p>
             <a:pPr lvl="0"/>
             <a:r>
-              <a:rPr lang="en-US" smtClean="0"/>
+              <a:rPr lang="en-US"/>
               <a:t>Click to edit Master text styles</a:t>
             </a:r>
           </a:p>
           <a:p>
             <a:pPr lvl="1"/>
             <a:r>
-              <a:rPr lang="en-US" smtClean="0"/>
+              <a:rPr lang="en-US"/>
               <a:t>Second level</a:t>
             </a:r>
           </a:p>
           <a:p>
             <a:pPr lvl="2"/>
             <a:r>
-              <a:rPr lang="en-US" smtClean="0"/>
+              <a:rPr lang="en-US"/>
               <a:t>Third level</a:t>
             </a:r>
           </a:p>
           <a:p>
             <a:pPr lvl="3"/>
             <a:r>
-              <a:rPr lang="en-US" smtClean="0"/>
+              <a:rPr lang="en-US"/>
               <a:t>Fourth level</a:t>
             </a:r>
           </a:p>
           <a:p>
             <a:pPr lvl="4"/>
             <a:r>
-              <a:rPr lang="en-US" smtClean="0"/>
+              <a:rPr lang="en-US"/>
               <a:t>Fifth level</a:t>
             </a:r>
-            <a:endParaRPr lang="en-US"/>
           </a:p>
         </p:txBody>
       </p:sp>
@@ -816,7 +824,7 @@
             <a:fld id="{1D8BD707-D9CF-40AE-B4C6-C98DA3205C09}" type="datetimeFigureOut">
               <a:rPr lang="en-US" smtClean="0"/>
               <a:pPr/>
-              <a:t>8/1/2011</a:t>
+              <a:t>2/5/2026</a:t>
             </a:fld>
             <a:endParaRPr lang="en-US"/>
           </a:p>
@@ -915,10 +923,9 @@
           </a:lstStyle>
           <a:p>
             <a:r>
-              <a:rPr lang="en-US" smtClean="0"/>
+              <a:rPr lang="en-US"/>
               <a:t>Click to edit Master title style</a:t>
             </a:r>
-            <a:endParaRPr lang="en-US"/>
           </a:p>
         </p:txBody>
       </p:sp>
@@ -1035,7 +1042,7 @@
           <a:p>
             <a:pPr lvl="0"/>
             <a:r>
-              <a:rPr lang="en-US" smtClean="0"/>
+              <a:rPr lang="en-US"/>
               <a:t>Click to edit Master text styles</a:t>
             </a:r>
           </a:p>
@@ -1059,7 +1066,7 @@
             <a:fld id="{1D8BD707-D9CF-40AE-B4C6-C98DA3205C09}" type="datetimeFigureOut">
               <a:rPr lang="en-US" smtClean="0"/>
               <a:pPr/>
-              <a:t>8/1/2011</a:t>
+              <a:t>2/5/2026</a:t>
             </a:fld>
             <a:endParaRPr lang="en-US"/>
           </a:p>
@@ -1149,10 +1156,9 @@
           <a:lstStyle/>
           <a:p>
             <a:r>
-              <a:rPr lang="en-US" smtClean="0"/>
+              <a:rPr lang="en-US"/>
               <a:t>Click to edit Master title style</a:t>
             </a:r>
-            <a:endParaRPr lang="en-US"/>
           </a:p>
         </p:txBody>
       </p:sp>
@@ -1206,38 +1212,37 @@
           <a:p>
             <a:pPr lvl="0"/>
             <a:r>
-              <a:rPr lang="en-US" smtClean="0"/>
+              <a:rPr lang="en-US"/>
               <a:t>Click to edit Master text styles</a:t>
             </a:r>
           </a:p>
           <a:p>
             <a:pPr lvl="1"/>
             <a:r>
-              <a:rPr lang="en-US" smtClean="0"/>
+              <a:rPr lang="en-US"/>
               <a:t>Second level</a:t>
             </a:r>
           </a:p>
           <a:p>
             <a:pPr lvl="2"/>
             <a:r>
-              <a:rPr lang="en-US" smtClean="0"/>
+              <a:rPr lang="en-US"/>
               <a:t>Third level</a:t>
             </a:r>
           </a:p>
           <a:p>
             <a:pPr lvl="3"/>
             <a:r>
-              <a:rPr lang="en-US" smtClean="0"/>
+              <a:rPr lang="en-US"/>
               <a:t>Fourth level</a:t>
             </a:r>
           </a:p>
           <a:p>
             <a:pPr lvl="4"/>
             <a:r>
-              <a:rPr lang="en-US" smtClean="0"/>
+              <a:rPr lang="en-US"/>
               <a:t>Fifth level</a:t>
             </a:r>
-            <a:endParaRPr lang="en-US"/>
           </a:p>
         </p:txBody>
       </p:sp>
@@ -1291,38 +1296,37 @@
           <a:p>
             <a:pPr lvl="0"/>
             <a:r>
-              <a:rPr lang="en-US" smtClean="0"/>
+              <a:rPr lang="en-US"/>
               <a:t>Click to edit Master text styles</a:t>
             </a:r>
           </a:p>
           <a:p>
             <a:pPr lvl="1"/>
             <a:r>
-              <a:rPr lang="en-US" smtClean="0"/>
+              <a:rPr lang="en-US"/>
               <a:t>Second level</a:t>
             </a:r>
           </a:p>
           <a:p>
             <a:pPr lvl="2"/>
             <a:r>
-              <a:rPr lang="en-US" smtClean="0"/>
+              <a:rPr lang="en-US"/>
               <a:t>Third level</a:t>
             </a:r>
           </a:p>
           <a:p>
             <a:pPr lvl="3"/>
             <a:r>
-              <a:rPr lang="en-US" smtClean="0"/>
+              <a:rPr lang="en-US"/>
               <a:t>Fourth level</a:t>
             </a:r>
           </a:p>
           <a:p>
             <a:pPr lvl="4"/>
             <a:r>
-              <a:rPr lang="en-US" smtClean="0"/>
+              <a:rPr lang="en-US"/>
               <a:t>Fifth level</a:t>
             </a:r>
-            <a:endParaRPr lang="en-US"/>
           </a:p>
         </p:txBody>
       </p:sp>
@@ -1344,7 +1348,7 @@
             <a:fld id="{1D8BD707-D9CF-40AE-B4C6-C98DA3205C09}" type="datetimeFigureOut">
               <a:rPr lang="en-US" smtClean="0"/>
               <a:pPr/>
-              <a:t>8/1/2011</a:t>
+              <a:t>2/5/2026</a:t>
             </a:fld>
             <a:endParaRPr lang="en-US"/>
           </a:p>
@@ -1438,10 +1442,9 @@
           </a:lstStyle>
           <a:p>
             <a:r>
-              <a:rPr lang="en-US" smtClean="0"/>
+              <a:rPr lang="en-US"/>
               <a:t>Click to edit Master title style</a:t>
             </a:r>
-            <a:endParaRPr lang="en-US"/>
           </a:p>
         </p:txBody>
       </p:sp>
@@ -1504,7 +1507,7 @@
           <a:p>
             <a:pPr lvl="0"/>
             <a:r>
-              <a:rPr lang="en-US" smtClean="0"/>
+              <a:rPr lang="en-US"/>
               <a:t>Click to edit Master text styles</a:t>
             </a:r>
           </a:p>
@@ -1560,38 +1563,37 @@
           <a:p>
             <a:pPr lvl="0"/>
             <a:r>
-              <a:rPr lang="en-US" smtClean="0"/>
+              <a:rPr lang="en-US"/>
               <a:t>Click to edit Master text styles</a:t>
             </a:r>
           </a:p>
           <a:p>
             <a:pPr lvl="1"/>
             <a:r>
-              <a:rPr lang="en-US" smtClean="0"/>
+              <a:rPr lang="en-US"/>
               <a:t>Second level</a:t>
             </a:r>
           </a:p>
           <a:p>
             <a:pPr lvl="2"/>
             <a:r>
-              <a:rPr lang="en-US" smtClean="0"/>
+              <a:rPr lang="en-US"/>
               <a:t>Third level</a:t>
             </a:r>
           </a:p>
           <a:p>
             <a:pPr lvl="3"/>
             <a:r>
-              <a:rPr lang="en-US" smtClean="0"/>
+              <a:rPr lang="en-US"/>
               <a:t>Fourth level</a:t>
             </a:r>
           </a:p>
           <a:p>
             <a:pPr lvl="4"/>
             <a:r>
-              <a:rPr lang="en-US" smtClean="0"/>
+              <a:rPr lang="en-US"/>
               <a:t>Fifth level</a:t>
             </a:r>
-            <a:endParaRPr lang="en-US"/>
           </a:p>
         </p:txBody>
       </p:sp>
@@ -1654,7 +1656,7 @@
           <a:p>
             <a:pPr lvl="0"/>
             <a:r>
-              <a:rPr lang="en-US" smtClean="0"/>
+              <a:rPr lang="en-US"/>
               <a:t>Click to edit Master text styles</a:t>
             </a:r>
           </a:p>
@@ -1710,38 +1712,37 @@
           <a:p>
             <a:pPr lvl="0"/>
             <a:r>
-              <a:rPr lang="en-US" smtClean="0"/>
+              <a:rPr lang="en-US"/>
               <a:t>Click to edit Master text styles</a:t>
             </a:r>
           </a:p>
           <a:p>
             <a:pPr lvl="1"/>
             <a:r>
-              <a:rPr lang="en-US" smtClean="0"/>
+              <a:rPr lang="en-US"/>
               <a:t>Second level</a:t>
             </a:r>
           </a:p>
           <a:p>
             <a:pPr lvl="2"/>
             <a:r>
-              <a:rPr lang="en-US" smtClean="0"/>
+              <a:rPr lang="en-US"/>
               <a:t>Third level</a:t>
             </a:r>
           </a:p>
           <a:p>
             <a:pPr lvl="3"/>
             <a:r>
-              <a:rPr lang="en-US" smtClean="0"/>
+              <a:rPr lang="en-US"/>
               <a:t>Fourth level</a:t>
             </a:r>
           </a:p>
           <a:p>
             <a:pPr lvl="4"/>
             <a:r>
-              <a:rPr lang="en-US" smtClean="0"/>
+              <a:rPr lang="en-US"/>
               <a:t>Fifth level</a:t>
             </a:r>
-            <a:endParaRPr lang="en-US"/>
           </a:p>
         </p:txBody>
       </p:sp>
@@ -1763,7 +1764,7 @@
             <a:fld id="{1D8BD707-D9CF-40AE-B4C6-C98DA3205C09}" type="datetimeFigureOut">
               <a:rPr lang="en-US" smtClean="0"/>
               <a:pPr/>
-              <a:t>8/1/2011</a:t>
+              <a:t>2/5/2026</a:t>
             </a:fld>
             <a:endParaRPr lang="en-US"/>
           </a:p>
@@ -1853,10 +1854,9 @@
           <a:lstStyle/>
           <a:p>
             <a:r>
-              <a:rPr lang="en-US" smtClean="0"/>
+              <a:rPr lang="en-US"/>
               <a:t>Click to edit Master title style</a:t>
             </a:r>
-            <a:endParaRPr lang="en-US"/>
           </a:p>
         </p:txBody>
       </p:sp>
@@ -1878,7 +1878,7 @@
             <a:fld id="{1D8BD707-D9CF-40AE-B4C6-C98DA3205C09}" type="datetimeFigureOut">
               <a:rPr lang="en-US" smtClean="0"/>
               <a:pPr/>
-              <a:t>8/1/2011</a:t>
+              <a:t>2/5/2026</a:t>
             </a:fld>
             <a:endParaRPr lang="en-US"/>
           </a:p>
@@ -1970,7 +1970,7 @@
             <a:fld id="{1D8BD707-D9CF-40AE-B4C6-C98DA3205C09}" type="datetimeFigureOut">
               <a:rPr lang="en-US" smtClean="0"/>
               <a:pPr/>
-              <a:t>8/1/2011</a:t>
+              <a:t>2/5/2026</a:t>
             </a:fld>
             <a:endParaRPr lang="en-US"/>
           </a:p>
@@ -2069,10 +2069,9 @@
           </a:lstStyle>
           <a:p>
             <a:r>
-              <a:rPr lang="en-US" smtClean="0"/>
+              <a:rPr lang="en-US"/>
               <a:t>Click to edit Master title style</a:t>
             </a:r>
-            <a:endParaRPr lang="en-US"/>
           </a:p>
         </p:txBody>
       </p:sp>
@@ -2126,38 +2125,37 @@
           <a:p>
             <a:pPr lvl="0"/>
             <a:r>
-              <a:rPr lang="en-US" smtClean="0"/>
+              <a:rPr lang="en-US"/>
               <a:t>Click to edit Master text styles</a:t>
             </a:r>
           </a:p>
           <a:p>
             <a:pPr lvl="1"/>
             <a:r>
-              <a:rPr lang="en-US" smtClean="0"/>
+              <a:rPr lang="en-US"/>
               <a:t>Second level</a:t>
             </a:r>
           </a:p>
           <a:p>
             <a:pPr lvl="2"/>
             <a:r>
-              <a:rPr lang="en-US" smtClean="0"/>
+              <a:rPr lang="en-US"/>
               <a:t>Third level</a:t>
             </a:r>
           </a:p>
           <a:p>
             <a:pPr lvl="3"/>
             <a:r>
-              <a:rPr lang="en-US" smtClean="0"/>
+              <a:rPr lang="en-US"/>
               <a:t>Fourth level</a:t>
             </a:r>
           </a:p>
           <a:p>
             <a:pPr lvl="4"/>
             <a:r>
-              <a:rPr lang="en-US" smtClean="0"/>
+              <a:rPr lang="en-US"/>
               <a:t>Fifth level</a:t>
             </a:r>
-            <a:endParaRPr lang="en-US"/>
           </a:p>
         </p:txBody>
       </p:sp>
@@ -2220,7 +2218,7 @@
           <a:p>
             <a:pPr lvl="0"/>
             <a:r>
-              <a:rPr lang="en-US" smtClean="0"/>
+              <a:rPr lang="en-US"/>
               <a:t>Click to edit Master text styles</a:t>
             </a:r>
           </a:p>
@@ -2244,7 +2242,7 @@
             <a:fld id="{1D8BD707-D9CF-40AE-B4C6-C98DA3205C09}" type="datetimeFigureOut">
               <a:rPr lang="en-US" smtClean="0"/>
               <a:pPr/>
-              <a:t>8/1/2011</a:t>
+              <a:t>2/5/2026</a:t>
             </a:fld>
             <a:endParaRPr lang="en-US"/>
           </a:p>
@@ -2343,10 +2341,9 @@
           </a:lstStyle>
           <a:p>
             <a:r>
-              <a:rPr lang="en-US" smtClean="0"/>
+              <a:rPr lang="en-US"/>
               <a:t>Click to edit Master title style</a:t>
             </a:r>
-            <a:endParaRPr lang="en-US"/>
           </a:p>
         </p:txBody>
       </p:sp>
@@ -2470,7 +2467,7 @@
           <a:p>
             <a:pPr lvl="0"/>
             <a:r>
-              <a:rPr lang="en-US" smtClean="0"/>
+              <a:rPr lang="en-US"/>
               <a:t>Click to edit Master text styles</a:t>
             </a:r>
           </a:p>
@@ -2494,7 +2491,7 @@
             <a:fld id="{1D8BD707-D9CF-40AE-B4C6-C98DA3205C09}" type="datetimeFigureOut">
               <a:rPr lang="en-US" smtClean="0"/>
               <a:pPr/>
-              <a:t>8/1/2011</a:t>
+              <a:t>2/5/2026</a:t>
             </a:fld>
             <a:endParaRPr lang="en-US"/>
           </a:p>
@@ -2599,10 +2596,9 @@
           <a:lstStyle/>
           <a:p>
             <a:r>
-              <a:rPr lang="en-US" smtClean="0"/>
+              <a:rPr lang="en-US"/>
               <a:t>Click to edit Master title style</a:t>
             </a:r>
-            <a:endParaRPr lang="en-US"/>
           </a:p>
         </p:txBody>
       </p:sp>
@@ -2633,38 +2629,37 @@
           <a:p>
             <a:pPr lvl="0"/>
             <a:r>
-              <a:rPr lang="en-US" smtClean="0"/>
+              <a:rPr lang="en-US"/>
               <a:t>Click to edit Master text styles</a:t>
             </a:r>
           </a:p>
           <a:p>
             <a:pPr lvl="1"/>
             <a:r>
-              <a:rPr lang="en-US" smtClean="0"/>
+              <a:rPr lang="en-US"/>
               <a:t>Second level</a:t>
             </a:r>
           </a:p>
           <a:p>
             <a:pPr lvl="2"/>
             <a:r>
-              <a:rPr lang="en-US" smtClean="0"/>
+              <a:rPr lang="en-US"/>
               <a:t>Third level</a:t>
             </a:r>
           </a:p>
           <a:p>
             <a:pPr lvl="3"/>
             <a:r>
-              <a:rPr lang="en-US" smtClean="0"/>
+              <a:rPr lang="en-US"/>
               <a:t>Fourth level</a:t>
             </a:r>
           </a:p>
           <a:p>
             <a:pPr lvl="4"/>
             <a:r>
-              <a:rPr lang="en-US" smtClean="0"/>
+              <a:rPr lang="en-US"/>
               <a:t>Fifth level</a:t>
             </a:r>
-            <a:endParaRPr lang="en-US"/>
           </a:p>
         </p:txBody>
       </p:sp>
@@ -2704,7 +2699,7 @@
             <a:fld id="{1D8BD707-D9CF-40AE-B4C6-C98DA3205C09}" type="datetimeFigureOut">
               <a:rPr lang="en-US" smtClean="0"/>
               <a:pPr/>
-              <a:t>8/1/2011</a:t>
+              <a:t>2/5/2026</a:t>
             </a:fld>
             <a:endParaRPr lang="en-US"/>
           </a:p>
@@ -3059,7 +3054,7 @@
 </file>
 
 <file path=ppt/slides/slide1.xml><?xml version="1.0" encoding="utf-8"?>
-<p:sld xmlns:p="http://schemas.openxmlformats.org/presentationml/2006/main" xmlns:a="http://schemas.openxmlformats.org/drawingml/2006/main" xmlns:r="http://schemas.openxmlformats.org/officeDocument/2006/relationships">
+<p:sld xmlns:a="http://schemas.openxmlformats.org/drawingml/2006/main" xmlns:r="http://schemas.openxmlformats.org/officeDocument/2006/relationships" xmlns:p="http://schemas.openxmlformats.org/presentationml/2006/main">
   <p:cSld>
     <p:spTree>
       <p:nvGrpSpPr>
@@ -3077,12 +3072,12 @@
       </p:grpSpPr>
       <p:sp>
         <p:nvSpPr>
-          <p:cNvPr name="Freeform 2" id="2"/>
+          <p:cNvPr id="2" name="Freeform 2"/>
           <p:cNvSpPr/>
           <p:nvPr/>
         </p:nvSpPr>
         <p:spPr>
-          <a:xfrm flipH="false" flipV="false" rot="0">
+          <a:xfrm>
             <a:off x="0" y="0"/>
             <a:ext cx="18288000" cy="10287000"/>
           </a:xfrm>
@@ -3091,9 +3086,9 @@
             <a:gdLst/>
             <a:ahLst/>
             <a:cxnLst/>
-            <a:rect r="r" b="b" t="t" l="l"/>
+            <a:rect l="l" t="t" r="r" b="b"/>
             <a:pathLst>
-              <a:path h="10287000" w="18288000">
+              <a:path w="18288000" h="10287000">
                 <a:moveTo>
                   <a:pt x="0" y="0"/>
                 </a:moveTo>
@@ -3116,19 +3111,26 @@
           <a:blipFill>
             <a:blip r:embed="rId2"/>
             <a:stretch>
-              <a:fillRect l="0" t="-9313" r="0" b="-9313"/>
+              <a:fillRect t="-9313" b="-9313"/>
             </a:stretch>
           </a:blipFill>
         </p:spPr>
-      </p:sp>
-      <p:sp>
-        <p:nvSpPr>
-          <p:cNvPr name="Freeform 3" id="3"/>
+        <p:txBody>
+          <a:bodyPr/>
+          <a:lstStyle/>
+          <a:p>
+            <a:endParaRPr lang="en-AE" dirty="0"/>
+          </a:p>
+        </p:txBody>
+      </p:sp>
+      <p:sp>
+        <p:nvSpPr>
+          <p:cNvPr id="3" name="Freeform 3"/>
           <p:cNvSpPr/>
           <p:nvPr/>
         </p:nvSpPr>
         <p:spPr>
-          <a:xfrm flipH="true" flipV="true" rot="0">
+          <a:xfrm flipH="1" flipV="1">
             <a:off x="11219740" y="3391711"/>
             <a:ext cx="7546070" cy="7543617"/>
           </a:xfrm>
@@ -3137,9 +3139,9 @@
             <a:gdLst/>
             <a:ahLst/>
             <a:cxnLst/>
-            <a:rect r="r" b="b" t="t" l="l"/>
+            <a:rect l="l" t="t" r="r" b="b"/>
             <a:pathLst>
-              <a:path h="7543617" w="7546070">
+              <a:path w="7546070" h="7543617">
                 <a:moveTo>
                   <a:pt x="7546071" y="7543617"/>
                 </a:moveTo>
@@ -3168,19 +3170,26 @@
               </a:extLst>
             </a:blip>
             <a:stretch>
-              <a:fillRect l="0" t="0" r="0" b="0"/>
+              <a:fillRect/>
             </a:stretch>
           </a:blipFill>
         </p:spPr>
-      </p:sp>
-      <p:sp>
-        <p:nvSpPr>
-          <p:cNvPr name="Freeform 4" id="4"/>
+        <p:txBody>
+          <a:bodyPr/>
+          <a:lstStyle/>
+          <a:p>
+            <a:endParaRPr lang="en-AE"/>
+          </a:p>
+        </p:txBody>
+      </p:sp>
+      <p:sp>
+        <p:nvSpPr>
+          <p:cNvPr id="4" name="Freeform 4"/>
           <p:cNvSpPr/>
           <p:nvPr/>
         </p:nvSpPr>
         <p:spPr>
-          <a:xfrm flipH="false" flipV="false" rot="0">
+          <a:xfrm>
             <a:off x="-307910" y="-209550"/>
             <a:ext cx="7546070" cy="7543617"/>
           </a:xfrm>
@@ -3189,9 +3198,9 @@
             <a:gdLst/>
             <a:ahLst/>
             <a:cxnLst/>
-            <a:rect r="r" b="b" t="t" l="l"/>
+            <a:rect l="l" t="t" r="r" b="b"/>
             <a:pathLst>
-              <a:path h="7543617" w="7546070">
+              <a:path w="7546070" h="7543617">
                 <a:moveTo>
                   <a:pt x="0" y="0"/>
                 </a:moveTo>
@@ -3220,19 +3229,26 @@
               </a:extLst>
             </a:blip>
             <a:stretch>
-              <a:fillRect l="0" t="0" r="0" b="0"/>
+              <a:fillRect/>
             </a:stretch>
           </a:blipFill>
         </p:spPr>
-      </p:sp>
-      <p:sp>
-        <p:nvSpPr>
-          <p:cNvPr name="TextBox 5" id="5"/>
-          <p:cNvSpPr txBox="true"/>
+        <p:txBody>
+          <a:bodyPr/>
+          <a:lstStyle/>
+          <a:p>
+            <a:endParaRPr lang="en-AE"/>
+          </a:p>
+        </p:txBody>
+      </p:sp>
+      <p:sp>
+        <p:nvSpPr>
+          <p:cNvPr id="5" name="TextBox 5"/>
+          <p:cNvSpPr txBox="1"/>
           <p:nvPr/>
         </p:nvSpPr>
         <p:spPr>
-          <a:xfrm rot="0">
+          <a:xfrm>
             <a:off x="398170" y="4002613"/>
             <a:ext cx="17461757" cy="1455212"/>
           </a:xfrm>
@@ -3241,7 +3257,7 @@
           </a:prstGeom>
         </p:spPr>
         <p:txBody>
-          <a:bodyPr anchor="t" rtlCol="false" tIns="0" lIns="0" bIns="0" rIns="0">
+          <a:bodyPr lIns="0" tIns="0" rIns="0" bIns="0" rtlCol="0" anchor="t">
             <a:spAutoFit/>
           </a:bodyPr>
           <a:lstStyle/>
@@ -3255,7 +3271,7 @@
               </a:spcBef>
             </a:pPr>
             <a:r>
-              <a:rPr lang="en-US" sz="7958">
+              <a:rPr lang="en-US" sz="7958" dirty="0">
                 <a:solidFill>
                   <a:srgbClr val="FFFFFF"/>
                 </a:solidFill>
@@ -3271,12 +3287,12 @@
       </p:sp>
       <p:grpSp>
         <p:nvGrpSpPr>
-          <p:cNvPr name="Group 6" id="6"/>
+          <p:cNvPr id="6" name="Group 6"/>
           <p:cNvGrpSpPr/>
           <p:nvPr/>
         </p:nvGrpSpPr>
         <p:grpSpPr>
-          <a:xfrm rot="0">
+          <a:xfrm>
             <a:off x="4458830" y="5530222"/>
             <a:ext cx="9370339" cy="1365066"/>
             <a:chOff x="0" y="0"/>
@@ -3285,12 +3301,12 @@
         </p:grpSpPr>
         <p:sp>
           <p:nvSpPr>
-            <p:cNvPr name="Freeform 7" id="7"/>
+            <p:cNvPr id="7" name="Freeform 7"/>
             <p:cNvSpPr/>
             <p:nvPr/>
           </p:nvSpPr>
           <p:spPr>
-            <a:xfrm flipH="false" flipV="false" rot="0">
+            <a:xfrm>
               <a:off x="0" y="0"/>
               <a:ext cx="2789686" cy="406400"/>
             </a:xfrm>
@@ -3299,9 +3315,9 @@
               <a:gdLst/>
               <a:ahLst/>
               <a:cxnLst/>
-              <a:rect r="r" b="b" t="t" l="l"/>
+              <a:rect l="l" t="t" r="r" b="b"/>
               <a:pathLst>
-                <a:path h="406400" w="2789686">
+                <a:path w="2789686" h="406400">
                   <a:moveTo>
                     <a:pt x="2586486" y="0"/>
                   </a:moveTo>
@@ -3340,11 +3356,18 @@
               <a:miter/>
             </a:ln>
           </p:spPr>
+          <p:txBody>
+            <a:bodyPr/>
+            <a:lstStyle/>
+            <a:p>
+              <a:endParaRPr lang="en-AE"/>
+            </a:p>
+          </p:txBody>
         </p:sp>
         <p:sp>
           <p:nvSpPr>
-            <p:cNvPr name="TextBox 8" id="8"/>
-            <p:cNvSpPr txBox="true"/>
+            <p:cNvPr id="8" name="TextBox 8"/>
+            <p:cNvSpPr txBox="1"/>
             <p:nvPr/>
           </p:nvSpPr>
           <p:spPr>
@@ -3357,7 +3380,7 @@
             </a:prstGeom>
           </p:spPr>
           <p:txBody>
-            <a:bodyPr anchor="ctr" rtlCol="false" tIns="50800" lIns="50800" bIns="50800" rIns="50800"/>
+            <a:bodyPr lIns="50800" tIns="50800" rIns="50800" bIns="50800" rtlCol="0" anchor="ctr"/>
             <a:lstStyle/>
             <a:p>
               <a:pPr algn="ctr">
@@ -3368,18 +3391,19 @@
                   <a:spcPct val="0"/>
                 </a:spcBef>
               </a:pPr>
+              <a:endParaRPr/>
             </a:p>
           </p:txBody>
         </p:sp>
       </p:grpSp>
       <p:sp>
         <p:nvSpPr>
-          <p:cNvPr name="Freeform 9" id="9"/>
+          <p:cNvPr id="9" name="Freeform 9"/>
           <p:cNvSpPr/>
           <p:nvPr/>
         </p:nvSpPr>
         <p:spPr>
-          <a:xfrm flipH="false" flipV="false" rot="0">
+          <a:xfrm>
             <a:off x="16331832" y="1028700"/>
             <a:ext cx="927468" cy="231867"/>
           </a:xfrm>
@@ -3388,9 +3412,9 @@
             <a:gdLst/>
             <a:ahLst/>
             <a:cxnLst/>
-            <a:rect r="r" b="b" t="t" l="l"/>
+            <a:rect l="l" t="t" r="r" b="b"/>
             <a:pathLst>
-              <a:path h="231867" w="927468">
+              <a:path w="927468" h="231867">
                 <a:moveTo>
                   <a:pt x="0" y="0"/>
                 </a:moveTo>
@@ -3419,19 +3443,26 @@
               </a:extLst>
             </a:blip>
             <a:stretch>
-              <a:fillRect l="0" t="0" r="0" b="0"/>
+              <a:fillRect/>
             </a:stretch>
           </a:blipFill>
         </p:spPr>
-      </p:sp>
-      <p:sp>
-        <p:nvSpPr>
-          <p:cNvPr name="Freeform 10" id="10"/>
+        <p:txBody>
+          <a:bodyPr/>
+          <a:lstStyle/>
+          <a:p>
+            <a:endParaRPr lang="en-AE"/>
+          </a:p>
+        </p:txBody>
+      </p:sp>
+      <p:sp>
+        <p:nvSpPr>
+          <p:cNvPr id="10" name="Freeform 10"/>
           <p:cNvSpPr/>
           <p:nvPr/>
         </p:nvSpPr>
         <p:spPr>
-          <a:xfrm flipH="false" flipV="false" rot="0">
+          <a:xfrm>
             <a:off x="1028700" y="8955042"/>
             <a:ext cx="927468" cy="231867"/>
           </a:xfrm>
@@ -3440,9 +3471,9 @@
             <a:gdLst/>
             <a:ahLst/>
             <a:cxnLst/>
-            <a:rect r="r" b="b" t="t" l="l"/>
+            <a:rect l="l" t="t" r="r" b="b"/>
             <a:pathLst>
-              <a:path h="231867" w="927468">
+              <a:path w="927468" h="231867">
                 <a:moveTo>
                   <a:pt x="0" y="0"/>
                 </a:moveTo>
@@ -3471,19 +3502,26 @@
               </a:extLst>
             </a:blip>
             <a:stretch>
-              <a:fillRect l="0" t="0" r="0" b="0"/>
+              <a:fillRect/>
             </a:stretch>
           </a:blipFill>
         </p:spPr>
-      </p:sp>
-      <p:sp>
-        <p:nvSpPr>
-          <p:cNvPr name="TextBox 11" id="11"/>
-          <p:cNvSpPr txBox="true"/>
+        <p:txBody>
+          <a:bodyPr/>
+          <a:lstStyle/>
+          <a:p>
+            <a:endParaRPr lang="en-AE"/>
+          </a:p>
+        </p:txBody>
+      </p:sp>
+      <p:sp>
+        <p:nvSpPr>
+          <p:cNvPr id="11" name="TextBox 11"/>
+          <p:cNvSpPr txBox="1"/>
           <p:nvPr/>
         </p:nvSpPr>
         <p:spPr>
-          <a:xfrm rot="0">
+          <a:xfrm>
             <a:off x="4393779" y="5796831"/>
             <a:ext cx="9500442" cy="717550"/>
           </a:xfrm>
@@ -3492,7 +3530,7 @@
           </a:prstGeom>
         </p:spPr>
         <p:txBody>
-          <a:bodyPr anchor="t" rtlCol="false" tIns="0" lIns="0" bIns="0" rIns="0">
+          <a:bodyPr lIns="0" tIns="0" rIns="0" bIns="0" rtlCol="0" anchor="t">
             <a:spAutoFit/>
           </a:bodyPr>
           <a:lstStyle/>
@@ -3506,7 +3544,7 @@
               </a:spcBef>
             </a:pPr>
             <a:r>
-              <a:rPr lang="en-US" sz="3999">
+              <a:rPr lang="en-US" sz="3999" dirty="0">
                 <a:solidFill>
                   <a:srgbClr val="FCC760"/>
                 </a:solidFill>
@@ -3520,6 +3558,144 @@
           </a:p>
         </p:txBody>
       </p:sp>
+      <p:sp>
+        <p:nvSpPr>
+          <p:cNvPr id="12" name="TextBox 11">
+            <a:extLst>
+              <a:ext uri="{FF2B5EF4-FFF2-40B4-BE49-F238E27FC236}">
+                <a16:creationId xmlns:a16="http://schemas.microsoft.com/office/drawing/2014/main" id="{FE26CD75-18BE-91FA-F2C6-099EA0A4ED54}"/>
+              </a:ext>
+            </a:extLst>
+          </p:cNvPr>
+          <p:cNvSpPr txBox="1"/>
+          <p:nvPr/>
+        </p:nvSpPr>
+        <p:spPr>
+          <a:xfrm>
+            <a:off x="4109583" y="6835279"/>
+            <a:ext cx="10068832" cy="3511731"/>
+          </a:xfrm>
+          <a:prstGeom prst="rect">
+            <a:avLst/>
+          </a:prstGeom>
+        </p:spPr>
+        <p:txBody>
+          <a:bodyPr wrap="square" lIns="0" tIns="0" rIns="0" bIns="0" rtlCol="0" anchor="t">
+            <a:spAutoFit/>
+          </a:bodyPr>
+          <a:lstStyle/>
+          <a:p>
+            <a:pPr algn="ctr">
+              <a:lnSpc>
+                <a:spcPts val="5599"/>
+              </a:lnSpc>
+              <a:spcBef>
+                <a:spcPct val="0"/>
+              </a:spcBef>
+            </a:pPr>
+            <a:r>
+              <a:rPr lang="en-US" sz="2800" dirty="0">
+                <a:solidFill>
+                  <a:srgbClr val="FCC760"/>
+                </a:solidFill>
+                <a:latin typeface="Poppins"/>
+                <a:ea typeface="Poppins"/>
+                <a:cs typeface="Poppins"/>
+                <a:sym typeface="Poppins"/>
+              </a:rPr>
+              <a:t>Group Members:</a:t>
+            </a:r>
+          </a:p>
+          <a:p>
+            <a:pPr algn="ctr">
+              <a:lnSpc>
+                <a:spcPts val="5599"/>
+              </a:lnSpc>
+              <a:spcBef>
+                <a:spcPct val="0"/>
+              </a:spcBef>
+            </a:pPr>
+            <a:r>
+              <a:rPr lang="en-US" sz="2800" dirty="0">
+                <a:solidFill>
+                  <a:srgbClr val="FCC760"/>
+                </a:solidFill>
+                <a:latin typeface="Poppins"/>
+                <a:ea typeface="Poppins"/>
+                <a:cs typeface="Poppins"/>
+                <a:sym typeface="Poppins"/>
+              </a:rPr>
+              <a:t>Mohammed Adil (415006855)</a:t>
+            </a:r>
+          </a:p>
+          <a:p>
+            <a:pPr algn="ctr">
+              <a:lnSpc>
+                <a:spcPts val="5599"/>
+              </a:lnSpc>
+              <a:spcBef>
+                <a:spcPct val="0"/>
+              </a:spcBef>
+            </a:pPr>
+            <a:r>
+              <a:rPr lang="en-US" sz="2800" dirty="0">
+                <a:solidFill>
+                  <a:srgbClr val="FCC760"/>
+                </a:solidFill>
+                <a:latin typeface="Poppins"/>
+                <a:ea typeface="Poppins"/>
+                <a:cs typeface="Poppins"/>
+                <a:sym typeface="Poppins"/>
+              </a:rPr>
+              <a:t>Osama Ahmad (764000269)</a:t>
+            </a:r>
+          </a:p>
+          <a:p>
+            <a:pPr algn="ctr">
+              <a:lnSpc>
+                <a:spcPts val="5599"/>
+              </a:lnSpc>
+              <a:spcBef>
+                <a:spcPct val="0"/>
+              </a:spcBef>
+            </a:pPr>
+            <a:r>
+              <a:rPr lang="en-US" sz="2800" dirty="0">
+                <a:solidFill>
+                  <a:srgbClr val="FCC760"/>
+                </a:solidFill>
+                <a:latin typeface="Poppins"/>
+                <a:ea typeface="Poppins"/>
+                <a:cs typeface="Poppins"/>
+                <a:sym typeface="Poppins"/>
+              </a:rPr>
+              <a:t>Araz Hafez (433006927)</a:t>
+            </a:r>
+          </a:p>
+          <a:p>
+            <a:pPr algn="ctr">
+              <a:lnSpc>
+                <a:spcPts val="5599"/>
+              </a:lnSpc>
+              <a:spcBef>
+                <a:spcPct val="0"/>
+              </a:spcBef>
+            </a:pPr>
+            <a:r>
+              <a:rPr lang="en-US" sz="2800" dirty="0">
+                <a:solidFill>
+                  <a:srgbClr val="FCC760"/>
+                </a:solidFill>
+                <a:latin typeface="Poppins"/>
+                <a:ea typeface="Poppins"/>
+                <a:cs typeface="Poppins"/>
+                <a:sym typeface="Poppins"/>
+              </a:rPr>
+              <a:t>Muhammed Rashid (421007820)</a:t>
+            </a:r>
+          </a:p>
+        </p:txBody>
+      </p:sp>
     </p:spTree>
   </p:cSld>
   <p:clrMapOvr>
@@ -3529,13 +3705,14 @@
 </file>
 
 <file path=ppt/slides/slide2.xml><?xml version="1.0" encoding="utf-8"?>
-<p:sld xmlns:p="http://schemas.openxmlformats.org/presentationml/2006/main" xmlns:a="http://schemas.openxmlformats.org/drawingml/2006/main" xmlns:r="http://schemas.openxmlformats.org/officeDocument/2006/relationships">
+<p:sld xmlns:a="http://schemas.openxmlformats.org/drawingml/2006/main" xmlns:r="http://schemas.openxmlformats.org/officeDocument/2006/relationships" xmlns:p="http://schemas.openxmlformats.org/presentationml/2006/main">
   <p:cSld>
     <p:bg>
       <p:bgPr>
         <a:solidFill>
           <a:srgbClr val="17244D"/>
         </a:solidFill>
+        <a:effectLst/>
       </p:bgPr>
     </p:bg>
     <p:spTree>
@@ -3554,12 +3731,12 @@
       </p:grpSpPr>
       <p:grpSp>
         <p:nvGrpSpPr>
-          <p:cNvPr name="Group 2" id="2"/>
+          <p:cNvPr id="2" name="Group 2"/>
           <p:cNvGrpSpPr/>
           <p:nvPr/>
         </p:nvGrpSpPr>
         <p:grpSpPr>
-          <a:xfrm rot="0">
+          <a:xfrm>
             <a:off x="11291032" y="1028700"/>
             <a:ext cx="7446144" cy="8229600"/>
             <a:chOff x="0" y="0"/>
@@ -3568,12 +3745,12 @@
         </p:grpSpPr>
         <p:sp>
           <p:nvSpPr>
-            <p:cNvPr name="Freeform 3" id="3"/>
+            <p:cNvPr id="3" name="Freeform 3"/>
             <p:cNvSpPr/>
             <p:nvPr/>
           </p:nvSpPr>
           <p:spPr>
-            <a:xfrm flipH="false" flipV="false" rot="0">
+            <a:xfrm>
               <a:off x="0" y="0"/>
               <a:ext cx="964487" cy="1065967"/>
             </a:xfrm>
@@ -3582,9 +3759,9 @@
               <a:gdLst/>
               <a:ahLst/>
               <a:cxnLst/>
-              <a:rect r="r" b="b" t="t" l="l"/>
+              <a:rect l="l" t="t" r="r" b="b"/>
               <a:pathLst>
-                <a:path h="1065967" w="964487">
+                <a:path w="964487" h="1065967">
                   <a:moveTo>
                     <a:pt x="43668" y="0"/>
                   </a:moveTo>
@@ -3632,7 +3809,7 @@
             <a:blipFill>
               <a:blip r:embed="rId2"/>
               <a:stretch>
-                <a:fillRect l="-66399" t="0" r="-30083" b="0"/>
+                <a:fillRect l="-66399" r="-30083"/>
               </a:stretch>
             </a:blipFill>
             <a:ln w="66675" cap="rnd">
@@ -3643,16 +3820,23 @@
               <a:round/>
             </a:ln>
           </p:spPr>
+          <p:txBody>
+            <a:bodyPr/>
+            <a:lstStyle/>
+            <a:p>
+              <a:endParaRPr lang="en-AE"/>
+            </a:p>
+          </p:txBody>
         </p:sp>
       </p:grpSp>
       <p:sp>
         <p:nvSpPr>
-          <p:cNvPr name="Freeform 4" id="4"/>
+          <p:cNvPr id="4" name="Freeform 4"/>
           <p:cNvSpPr/>
           <p:nvPr/>
         </p:nvSpPr>
         <p:spPr>
-          <a:xfrm flipH="false" flipV="false" rot="0">
+          <a:xfrm>
             <a:off x="8944620" y="452883"/>
             <a:ext cx="1661085" cy="1543299"/>
           </a:xfrm>
@@ -3661,9 +3845,9 @@
             <a:gdLst/>
             <a:ahLst/>
             <a:cxnLst/>
-            <a:rect r="r" b="b" t="t" l="l"/>
+            <a:rect l="l" t="t" r="r" b="b"/>
             <a:pathLst>
-              <a:path h="1543299" w="1661085">
+              <a:path w="1661085" h="1543299">
                 <a:moveTo>
                   <a:pt x="0" y="0"/>
                 </a:moveTo>
@@ -3692,19 +3876,26 @@
               </a:extLst>
             </a:blip>
             <a:stretch>
-              <a:fillRect l="0" t="0" r="0" b="0"/>
+              <a:fillRect/>
             </a:stretch>
           </a:blipFill>
         </p:spPr>
-      </p:sp>
-      <p:sp>
-        <p:nvSpPr>
-          <p:cNvPr name="Freeform 5" id="5"/>
+        <p:txBody>
+          <a:bodyPr/>
+          <a:lstStyle/>
+          <a:p>
+            <a:endParaRPr lang="en-AE"/>
+          </a:p>
+        </p:txBody>
+      </p:sp>
+      <p:sp>
+        <p:nvSpPr>
+          <p:cNvPr id="5" name="Freeform 5"/>
           <p:cNvSpPr/>
           <p:nvPr/>
         </p:nvSpPr>
         <p:spPr>
-          <a:xfrm flipH="false" flipV="false" rot="0">
+          <a:xfrm>
             <a:off x="5900313" y="7764409"/>
             <a:ext cx="3243687" cy="2522591"/>
           </a:xfrm>
@@ -3713,9 +3904,9 @@
             <a:gdLst/>
             <a:ahLst/>
             <a:cxnLst/>
-            <a:rect r="r" b="b" t="t" l="l"/>
+            <a:rect l="l" t="t" r="r" b="b"/>
             <a:pathLst>
-              <a:path h="2522591" w="3243687">
+              <a:path w="3243687" h="2522591">
                 <a:moveTo>
                   <a:pt x="0" y="0"/>
                 </a:moveTo>
@@ -3744,19 +3935,26 @@
               </a:extLst>
             </a:blip>
             <a:stretch>
-              <a:fillRect l="0" t="0" r="0" b="0"/>
+              <a:fillRect/>
             </a:stretch>
           </a:blipFill>
         </p:spPr>
-      </p:sp>
-      <p:sp>
-        <p:nvSpPr>
-          <p:cNvPr name="TextBox 6" id="6"/>
-          <p:cNvSpPr txBox="true"/>
+        <p:txBody>
+          <a:bodyPr/>
+          <a:lstStyle/>
+          <a:p>
+            <a:endParaRPr lang="en-AE"/>
+          </a:p>
+        </p:txBody>
+      </p:sp>
+      <p:sp>
+        <p:nvSpPr>
+          <p:cNvPr id="6" name="TextBox 6"/>
+          <p:cNvSpPr txBox="1"/>
           <p:nvPr/>
         </p:nvSpPr>
         <p:spPr>
-          <a:xfrm rot="0">
+          <a:xfrm>
             <a:off x="1028700" y="1834258"/>
             <a:ext cx="9168583" cy="920750"/>
           </a:xfrm>
@@ -3765,7 +3963,7 @@
           </a:prstGeom>
         </p:spPr>
         <p:txBody>
-          <a:bodyPr anchor="t" rtlCol="false" tIns="0" lIns="0" bIns="0" rIns="0">
+          <a:bodyPr lIns="0" tIns="0" rIns="0" bIns="0" rtlCol="0" anchor="t">
             <a:spAutoFit/>
           </a:bodyPr>
           <a:lstStyle/>
@@ -3795,12 +3993,12 @@
       </p:sp>
       <p:sp>
         <p:nvSpPr>
-          <p:cNvPr name="TextBox 7" id="7"/>
-          <p:cNvSpPr txBox="true"/>
+          <p:cNvPr id="7" name="TextBox 7"/>
+          <p:cNvSpPr txBox="1"/>
           <p:nvPr/>
         </p:nvSpPr>
         <p:spPr>
-          <a:xfrm rot="0">
+          <a:xfrm>
             <a:off x="1028700" y="2895267"/>
             <a:ext cx="8808629" cy="5732057"/>
           </a:xfrm>
@@ -3809,7 +4007,7 @@
           </a:prstGeom>
         </p:spPr>
         <p:txBody>
-          <a:bodyPr anchor="t" rtlCol="false" tIns="0" lIns="0" bIns="0" rIns="0">
+          <a:bodyPr lIns="0" tIns="0" rIns="0" bIns="0" rtlCol="0" anchor="t">
             <a:spAutoFit/>
           </a:bodyPr>
           <a:lstStyle/>
@@ -3832,7 +4030,7 @@
               <a:t>Ou</a:t>
             </a:r>
             <a:r>
-              <a:rPr lang="en-US" sz="2328" strike="noStrike" u="none">
+              <a:rPr lang="en-US" sz="2328" u="none" strike="noStrike">
                 <a:solidFill>
                   <a:srgbClr val="FFFFFF"/>
                 </a:solidFill>
@@ -3841,10 +4039,22 @@
                 <a:cs typeface="Poppins"/>
                 <a:sym typeface="Poppins"/>
               </a:rPr>
-              <a:t>r</a:t>
-            </a:r>
-            <a:r>
-              <a:rPr lang="en-US" sz="2328" strike="noStrike" u="none">
+              <a:t>r idea is to build a </a:t>
+            </a:r>
+            <a:r>
+              <a:rPr lang="en-US" sz="2328" b="1" u="none" strike="noStrike">
+                <a:solidFill>
+                  <a:srgbClr val="FFFFFF"/>
+                </a:solidFill>
+                <a:latin typeface="Poppins Bold"/>
+                <a:ea typeface="Poppins Bold"/>
+                <a:cs typeface="Poppins Bold"/>
+                <a:sym typeface="Poppins Bold"/>
+              </a:rPr>
+              <a:t>Digital Field Booking System</a:t>
+            </a:r>
+            <a:r>
+              <a:rPr lang="en-US" sz="2328" u="none" strike="noStrike">
                 <a:solidFill>
                   <a:srgbClr val="FFFFFF"/>
                 </a:solidFill>
@@ -3853,46 +4063,10 @@
                 <a:cs typeface="Poppins"/>
                 <a:sym typeface="Poppins"/>
               </a:rPr>
-              <a:t> id</a:t>
-            </a:r>
-            <a:r>
-              <a:rPr lang="en-US" sz="2328" strike="noStrike" u="none">
-                <a:solidFill>
-                  <a:srgbClr val="FFFFFF"/>
-                </a:solidFill>
-                <a:latin typeface="Poppins"/>
-                <a:ea typeface="Poppins"/>
-                <a:cs typeface="Poppins"/>
-                <a:sym typeface="Poppins"/>
-              </a:rPr>
-              <a:t>ea is to bu</a:t>
-            </a:r>
-            <a:r>
-              <a:rPr lang="en-US" sz="2328" strike="noStrike" u="none">
-                <a:solidFill>
-                  <a:srgbClr val="FFFFFF"/>
-                </a:solidFill>
-                <a:latin typeface="Poppins"/>
-                <a:ea typeface="Poppins"/>
-                <a:cs typeface="Poppins"/>
-                <a:sym typeface="Poppins"/>
-              </a:rPr>
-              <a:t>ild</a:t>
-            </a:r>
-            <a:r>
-              <a:rPr lang="en-US" sz="2328" strike="noStrike" u="none">
-                <a:solidFill>
-                  <a:srgbClr val="FFFFFF"/>
-                </a:solidFill>
-                <a:latin typeface="Poppins"/>
-                <a:ea typeface="Poppins"/>
-                <a:cs typeface="Poppins"/>
-                <a:sym typeface="Poppins"/>
-              </a:rPr>
-              <a:t> a </a:t>
-            </a:r>
-            <a:r>
-              <a:rPr lang="en-US" b="true" sz="2328" strike="noStrike" u="none">
+              <a:t> called </a:t>
+            </a:r>
+            <a:r>
+              <a:rPr lang="en-US" sz="2328" b="1" u="none" strike="noStrike">
                 <a:solidFill>
                   <a:srgbClr val="FFFFFF"/>
                 </a:solidFill>
@@ -3901,154 +4075,10 @@
                 <a:cs typeface="Poppins Bold"/>
                 <a:sym typeface="Poppins Bold"/>
               </a:rPr>
-              <a:t>Digital Field</a:t>
-            </a:r>
-            <a:r>
-              <a:rPr lang="en-US" b="true" sz="2328" strike="noStrike" u="none">
-                <a:solidFill>
-                  <a:srgbClr val="FFFFFF"/>
-                </a:solidFill>
-                <a:latin typeface="Poppins Bold"/>
-                <a:ea typeface="Poppins Bold"/>
-                <a:cs typeface="Poppins Bold"/>
-                <a:sym typeface="Poppins Bold"/>
-              </a:rPr>
-              <a:t> B</a:t>
-            </a:r>
-            <a:r>
-              <a:rPr lang="en-US" b="true" sz="2328" strike="noStrike" u="none">
-                <a:solidFill>
-                  <a:srgbClr val="FFFFFF"/>
-                </a:solidFill>
-                <a:latin typeface="Poppins Bold"/>
-                <a:ea typeface="Poppins Bold"/>
-                <a:cs typeface="Poppins Bold"/>
-                <a:sym typeface="Poppins Bold"/>
-              </a:rPr>
-              <a:t>oo</a:t>
-            </a:r>
-            <a:r>
-              <a:rPr lang="en-US" b="true" sz="2328" strike="noStrike" u="none">
-                <a:solidFill>
-                  <a:srgbClr val="FFFFFF"/>
-                </a:solidFill>
-                <a:latin typeface="Poppins Bold"/>
-                <a:ea typeface="Poppins Bold"/>
-                <a:cs typeface="Poppins Bold"/>
-                <a:sym typeface="Poppins Bold"/>
-              </a:rPr>
-              <a:t>king</a:t>
-            </a:r>
-            <a:r>
-              <a:rPr lang="en-US" b="true" sz="2328" strike="noStrike" u="none">
-                <a:solidFill>
-                  <a:srgbClr val="FFFFFF"/>
-                </a:solidFill>
-                <a:latin typeface="Poppins Bold"/>
-                <a:ea typeface="Poppins Bold"/>
-                <a:cs typeface="Poppins Bold"/>
-                <a:sym typeface="Poppins Bold"/>
-              </a:rPr>
-              <a:t> System</a:t>
-            </a:r>
-            <a:r>
-              <a:rPr lang="en-US" sz="2328" strike="noStrike" u="none">
-                <a:solidFill>
-                  <a:srgbClr val="FFFFFF"/>
-                </a:solidFill>
-                <a:latin typeface="Poppins"/>
-                <a:ea typeface="Poppins"/>
-                <a:cs typeface="Poppins"/>
-                <a:sym typeface="Poppins"/>
-              </a:rPr>
-              <a:t> </a:t>
-            </a:r>
-            <a:r>
-              <a:rPr lang="en-US" sz="2328" strike="noStrike" u="none">
-                <a:solidFill>
-                  <a:srgbClr val="FFFFFF"/>
-                </a:solidFill>
-                <a:latin typeface="Poppins"/>
-                <a:ea typeface="Poppins"/>
-                <a:cs typeface="Poppins"/>
-                <a:sym typeface="Poppins"/>
-              </a:rPr>
-              <a:t>c</a:t>
-            </a:r>
-            <a:r>
-              <a:rPr lang="en-US" sz="2328" strike="noStrike" u="none">
-                <a:solidFill>
-                  <a:srgbClr val="FFFFFF"/>
-                </a:solidFill>
-                <a:latin typeface="Poppins"/>
-                <a:ea typeface="Poppins"/>
-                <a:cs typeface="Poppins"/>
-                <a:sym typeface="Poppins"/>
-              </a:rPr>
-              <a:t>alle</a:t>
-            </a:r>
-            <a:r>
-              <a:rPr lang="en-US" sz="2328" strike="noStrike" u="none">
-                <a:solidFill>
-                  <a:srgbClr val="FFFFFF"/>
-                </a:solidFill>
-                <a:latin typeface="Poppins"/>
-                <a:ea typeface="Poppins"/>
-                <a:cs typeface="Poppins"/>
-                <a:sym typeface="Poppins"/>
-              </a:rPr>
-              <a:t>d</a:t>
-            </a:r>
-            <a:r>
-              <a:rPr lang="en-US" sz="2328" strike="noStrike" u="none">
-                <a:solidFill>
-                  <a:srgbClr val="FFFFFF"/>
-                </a:solidFill>
-                <a:latin typeface="Poppins"/>
-                <a:ea typeface="Poppins"/>
-                <a:cs typeface="Poppins"/>
-                <a:sym typeface="Poppins"/>
-              </a:rPr>
-              <a:t> </a:t>
-            </a:r>
-            <a:r>
-              <a:rPr lang="en-US" b="true" sz="2328" strike="noStrike" u="none">
-                <a:solidFill>
-                  <a:srgbClr val="FFFFFF"/>
-                </a:solidFill>
-                <a:latin typeface="Poppins Bold"/>
-                <a:ea typeface="Poppins Bold"/>
-                <a:cs typeface="Poppins Bold"/>
-                <a:sym typeface="Poppins Bold"/>
-              </a:rPr>
-              <a:t>FieldRese</a:t>
-            </a:r>
-            <a:r>
-              <a:rPr lang="en-US" b="true" sz="2328" strike="noStrike" u="none">
-                <a:solidFill>
-                  <a:srgbClr val="FFFFFF"/>
-                </a:solidFill>
-                <a:latin typeface="Poppins Bold"/>
-                <a:ea typeface="Poppins Bold"/>
-                <a:cs typeface="Poppins Bold"/>
-                <a:sym typeface="Poppins Bold"/>
-              </a:rPr>
-              <a:t>rv</a:t>
-            </a:r>
-            <a:r>
-              <a:rPr lang="en-US" b="true" sz="2328" strike="noStrike" u="none">
-                <a:solidFill>
-                  <a:srgbClr val="FFFFFF"/>
-                </a:solidFill>
-                <a:latin typeface="Poppins Bold"/>
-                <a:ea typeface="Poppins Bold"/>
-                <a:cs typeface="Poppins Bold"/>
-                <a:sym typeface="Poppins Bold"/>
-              </a:rPr>
-              <a:t>e</a:t>
-            </a:r>
-            <a:r>
-              <a:rPr lang="en-US" sz="2328" strike="noStrike" u="none">
+              <a:t>FieldReserve</a:t>
+            </a:r>
+            <a:r>
+              <a:rPr lang="en-US" sz="2328" u="none" strike="noStrike">
                 <a:solidFill>
                   <a:srgbClr val="FFFFFF"/>
                 </a:solidFill>
@@ -4067,7 +4097,7 @@
               </a:lnSpc>
             </a:pPr>
             <a:r>
-              <a:rPr lang="en-US" b="true" sz="2328" strike="noStrike" u="none">
+              <a:rPr lang="en-US" sz="2328" b="1" u="none" strike="noStrike">
                 <a:solidFill>
                   <a:srgbClr val="FFFFFF"/>
                 </a:solidFill>
@@ -4076,34 +4106,10 @@
                 <a:cs typeface="Poppins Bold"/>
                 <a:sym typeface="Poppins Bold"/>
               </a:rPr>
-              <a:t>FieldRese</a:t>
-            </a:r>
-            <a:r>
-              <a:rPr lang="en-US" b="true" sz="2328" strike="noStrike" u="none">
-                <a:solidFill>
-                  <a:srgbClr val="FFFFFF"/>
-                </a:solidFill>
-                <a:latin typeface="Poppins Bold"/>
-                <a:ea typeface="Poppins Bold"/>
-                <a:cs typeface="Poppins Bold"/>
-                <a:sym typeface="Poppins Bold"/>
-              </a:rPr>
-              <a:t>r</a:t>
-            </a:r>
-            <a:r>
-              <a:rPr lang="en-US" b="true" sz="2328" strike="noStrike" u="none">
-                <a:solidFill>
-                  <a:srgbClr val="FFFFFF"/>
-                </a:solidFill>
-                <a:latin typeface="Poppins Bold"/>
-                <a:ea typeface="Poppins Bold"/>
-                <a:cs typeface="Poppins Bold"/>
-                <a:sym typeface="Poppins Bold"/>
-              </a:rPr>
-              <a:t>ve</a:t>
-            </a:r>
-            <a:r>
-              <a:rPr lang="en-US" sz="2328" strike="noStrike" u="none">
+              <a:t>FieldReserve</a:t>
+            </a:r>
+            <a:r>
+              <a:rPr lang="en-US" sz="2328" u="none" strike="noStrike">
                 <a:solidFill>
                   <a:srgbClr val="FFFFFF"/>
                 </a:solidFill>
@@ -4112,10 +4118,17 @@
                 <a:cs typeface="Poppins"/>
                 <a:sym typeface="Poppins"/>
               </a:rPr>
-              <a:t> is</a:t>
-            </a:r>
-            <a:r>
-              <a:rPr lang="en-US" sz="2328" strike="noStrike" u="none">
+              <a:t> is a web-based application that allows sports enthusiasts and community groups to browse available sports fields and submit booking requests in a simple and conflict-free way.</a:t>
+            </a:r>
+          </a:p>
+          <a:p>
+            <a:pPr algn="just">
+              <a:lnSpc>
+                <a:spcPts val="3259"/>
+              </a:lnSpc>
+            </a:pPr>
+            <a:r>
+              <a:rPr lang="en-US" sz="2328" u="none" strike="noStrike">
                 <a:solidFill>
                   <a:srgbClr val="FFFFFF"/>
                 </a:solidFill>
@@ -4124,10 +4137,19 @@
                 <a:cs typeface="Poppins"/>
                 <a:sym typeface="Poppins"/>
               </a:rPr>
-              <a:t> a</a:t>
-            </a:r>
-            <a:r>
-              <a:rPr lang="en-US" sz="2328" strike="noStrike" u="none">
+              <a:t>Unlike complex scheduling platforms or phone calls, our system focuses on:</a:t>
+            </a:r>
+          </a:p>
+          <a:p>
+            <a:pPr marL="502716" lvl="1" indent="-251358" algn="just">
+              <a:lnSpc>
+                <a:spcPts val="3259"/>
+              </a:lnSpc>
+              <a:buFont typeface="Arial"/>
+              <a:buChar char="•"/>
+            </a:pPr>
+            <a:r>
+              <a:rPr lang="en-US" sz="2328" u="none" strike="noStrike">
                 <a:solidFill>
                   <a:srgbClr val="FFFFFF"/>
                 </a:solidFill>
@@ -4136,10 +4158,19 @@
                 <a:cs typeface="Poppins"/>
                 <a:sym typeface="Poppins"/>
               </a:rPr>
-              <a:t> web-base</a:t>
-            </a:r>
-            <a:r>
-              <a:rPr lang="en-US" sz="2328" strike="noStrike" u="none">
+              <a:t>Simplified reservations</a:t>
+            </a:r>
+          </a:p>
+          <a:p>
+            <a:pPr marL="502716" lvl="1" indent="-251358" algn="just">
+              <a:lnSpc>
+                <a:spcPts val="3259"/>
+              </a:lnSpc>
+              <a:buFont typeface="Arial"/>
+              <a:buChar char="•"/>
+            </a:pPr>
+            <a:r>
+              <a:rPr lang="en-US" sz="2328" u="none" strike="noStrike">
                 <a:solidFill>
                   <a:srgbClr val="FFFFFF"/>
                 </a:solidFill>
@@ -4148,10 +4179,19 @@
                 <a:cs typeface="Poppins"/>
                 <a:sym typeface="Poppins"/>
               </a:rPr>
-              <a:t>d</a:t>
-            </a:r>
-            <a:r>
-              <a:rPr lang="en-US" sz="2328" strike="noStrike" u="none">
+              <a:t>Clear field availability</a:t>
+            </a:r>
+          </a:p>
+          <a:p>
+            <a:pPr marL="502716" lvl="1" indent="-251358" algn="just">
+              <a:lnSpc>
+                <a:spcPts val="3259"/>
+              </a:lnSpc>
+              <a:buFont typeface="Arial"/>
+              <a:buChar char="•"/>
+            </a:pPr>
+            <a:r>
+              <a:rPr lang="en-US" sz="2328" u="none" strike="noStrike">
                 <a:solidFill>
                   <a:srgbClr val="FFFFFF"/>
                 </a:solidFill>
@@ -4160,10 +4200,17 @@
                 <a:cs typeface="Poppins"/>
                 <a:sym typeface="Poppins"/>
               </a:rPr>
-              <a:t> ap</a:t>
-            </a:r>
-            <a:r>
-              <a:rPr lang="en-US" sz="2328" strike="noStrike" u="none">
+              <a:t>Persistent user selections</a:t>
+            </a:r>
+          </a:p>
+          <a:p>
+            <a:pPr algn="just">
+              <a:lnSpc>
+                <a:spcPts val="3259"/>
+              </a:lnSpc>
+            </a:pPr>
+            <a:r>
+              <a:rPr lang="en-US" sz="2328" u="none" strike="noStrike">
                 <a:solidFill>
                   <a:srgbClr val="FFFFFF"/>
                 </a:solidFill>
@@ -4172,331 +4219,7 @@
                 <a:cs typeface="Poppins"/>
                 <a:sym typeface="Poppins"/>
               </a:rPr>
-              <a:t>p</a:t>
-            </a:r>
-            <a:r>
-              <a:rPr lang="en-US" sz="2328" strike="noStrike" u="none">
-                <a:solidFill>
-                  <a:srgbClr val="FFFFFF"/>
-                </a:solidFill>
-                <a:latin typeface="Poppins"/>
-                <a:ea typeface="Poppins"/>
-                <a:cs typeface="Poppins"/>
-                <a:sym typeface="Poppins"/>
-              </a:rPr>
-              <a:t>l</a:t>
-            </a:r>
-            <a:r>
-              <a:rPr lang="en-US" sz="2328" strike="noStrike" u="none">
-                <a:solidFill>
-                  <a:srgbClr val="FFFFFF"/>
-                </a:solidFill>
-                <a:latin typeface="Poppins"/>
-                <a:ea typeface="Poppins"/>
-                <a:cs typeface="Poppins"/>
-                <a:sym typeface="Poppins"/>
-              </a:rPr>
-              <a:t>ic</a:t>
-            </a:r>
-            <a:r>
-              <a:rPr lang="en-US" sz="2328" strike="noStrike" u="none">
-                <a:solidFill>
-                  <a:srgbClr val="FFFFFF"/>
-                </a:solidFill>
-                <a:latin typeface="Poppins"/>
-                <a:ea typeface="Poppins"/>
-                <a:cs typeface="Poppins"/>
-                <a:sym typeface="Poppins"/>
-              </a:rPr>
-              <a:t>at</a:t>
-            </a:r>
-            <a:r>
-              <a:rPr lang="en-US" sz="2328" strike="noStrike" u="none">
-                <a:solidFill>
-                  <a:srgbClr val="FFFFFF"/>
-                </a:solidFill>
-                <a:latin typeface="Poppins"/>
-                <a:ea typeface="Poppins"/>
-                <a:cs typeface="Poppins"/>
-                <a:sym typeface="Poppins"/>
-              </a:rPr>
-              <a:t>i</a:t>
-            </a:r>
-            <a:r>
-              <a:rPr lang="en-US" sz="2328" strike="noStrike" u="none">
-                <a:solidFill>
-                  <a:srgbClr val="FFFFFF"/>
-                </a:solidFill>
-                <a:latin typeface="Poppins"/>
-                <a:ea typeface="Poppins"/>
-                <a:cs typeface="Poppins"/>
-                <a:sym typeface="Poppins"/>
-              </a:rPr>
-              <a:t>o</a:t>
-            </a:r>
-            <a:r>
-              <a:rPr lang="en-US" sz="2328" strike="noStrike" u="none">
-                <a:solidFill>
-                  <a:srgbClr val="FFFFFF"/>
-                </a:solidFill>
-                <a:latin typeface="Poppins"/>
-                <a:ea typeface="Poppins"/>
-                <a:cs typeface="Poppins"/>
-                <a:sym typeface="Poppins"/>
-              </a:rPr>
-              <a:t>n that all</a:t>
-            </a:r>
-            <a:r>
-              <a:rPr lang="en-US" sz="2328" strike="noStrike" u="none">
-                <a:solidFill>
-                  <a:srgbClr val="FFFFFF"/>
-                </a:solidFill>
-                <a:latin typeface="Poppins"/>
-                <a:ea typeface="Poppins"/>
-                <a:cs typeface="Poppins"/>
-                <a:sym typeface="Poppins"/>
-              </a:rPr>
-              <a:t>ows spor</a:t>
-            </a:r>
-            <a:r>
-              <a:rPr lang="en-US" sz="2328" strike="noStrike" u="none">
-                <a:solidFill>
-                  <a:srgbClr val="FFFFFF"/>
-                </a:solidFill>
-                <a:latin typeface="Poppins"/>
-                <a:ea typeface="Poppins"/>
-                <a:cs typeface="Poppins"/>
-                <a:sym typeface="Poppins"/>
-              </a:rPr>
-              <a:t>ts enthusiasts a</a:t>
-            </a:r>
-            <a:r>
-              <a:rPr lang="en-US" sz="2328" strike="noStrike" u="none">
-                <a:solidFill>
-                  <a:srgbClr val="FFFFFF"/>
-                </a:solidFill>
-                <a:latin typeface="Poppins"/>
-                <a:ea typeface="Poppins"/>
-                <a:cs typeface="Poppins"/>
-                <a:sym typeface="Poppins"/>
-              </a:rPr>
-              <a:t>nd </a:t>
-            </a:r>
-            <a:r>
-              <a:rPr lang="en-US" sz="2328" strike="noStrike" u="none">
-                <a:solidFill>
-                  <a:srgbClr val="FFFFFF"/>
-                </a:solidFill>
-                <a:latin typeface="Poppins"/>
-                <a:ea typeface="Poppins"/>
-                <a:cs typeface="Poppins"/>
-                <a:sym typeface="Poppins"/>
-              </a:rPr>
-              <a:t>community gr</a:t>
-            </a:r>
-            <a:r>
-              <a:rPr lang="en-US" sz="2328" strike="noStrike" u="none">
-                <a:solidFill>
-                  <a:srgbClr val="FFFFFF"/>
-                </a:solidFill>
-                <a:latin typeface="Poppins"/>
-                <a:ea typeface="Poppins"/>
-                <a:cs typeface="Poppins"/>
-                <a:sym typeface="Poppins"/>
-              </a:rPr>
-              <a:t>ou</a:t>
-            </a:r>
-            <a:r>
-              <a:rPr lang="en-US" sz="2328" strike="noStrike" u="none">
-                <a:solidFill>
-                  <a:srgbClr val="FFFFFF"/>
-                </a:solidFill>
-                <a:latin typeface="Poppins"/>
-                <a:ea typeface="Poppins"/>
-                <a:cs typeface="Poppins"/>
-                <a:sym typeface="Poppins"/>
-              </a:rPr>
-              <a:t>p</a:t>
-            </a:r>
-            <a:r>
-              <a:rPr lang="en-US" sz="2328" strike="noStrike" u="none">
-                <a:solidFill>
-                  <a:srgbClr val="FFFFFF"/>
-                </a:solidFill>
-                <a:latin typeface="Poppins"/>
-                <a:ea typeface="Poppins"/>
-                <a:cs typeface="Poppins"/>
-                <a:sym typeface="Poppins"/>
-              </a:rPr>
-              <a:t>s to brows</a:t>
-            </a:r>
-            <a:r>
-              <a:rPr lang="en-US" sz="2328" strike="noStrike" u="none">
-                <a:solidFill>
-                  <a:srgbClr val="FFFFFF"/>
-                </a:solidFill>
-                <a:latin typeface="Poppins"/>
-                <a:ea typeface="Poppins"/>
-                <a:cs typeface="Poppins"/>
-                <a:sym typeface="Poppins"/>
-              </a:rPr>
-              <a:t>e available spor</a:t>
-            </a:r>
-            <a:r>
-              <a:rPr lang="en-US" sz="2328" strike="noStrike" u="none">
-                <a:solidFill>
-                  <a:srgbClr val="FFFFFF"/>
-                </a:solidFill>
-                <a:latin typeface="Poppins"/>
-                <a:ea typeface="Poppins"/>
-                <a:cs typeface="Poppins"/>
-                <a:sym typeface="Poppins"/>
-              </a:rPr>
-              <a:t>ts</a:t>
-            </a:r>
-            <a:r>
-              <a:rPr lang="en-US" sz="2328" strike="noStrike" u="none">
-                <a:solidFill>
-                  <a:srgbClr val="FFFFFF"/>
-                </a:solidFill>
-                <a:latin typeface="Poppins"/>
-                <a:ea typeface="Poppins"/>
-                <a:cs typeface="Poppins"/>
-                <a:sym typeface="Poppins"/>
-              </a:rPr>
-              <a:t> </a:t>
-            </a:r>
-            <a:r>
-              <a:rPr lang="en-US" sz="2328" strike="noStrike" u="none">
-                <a:solidFill>
-                  <a:srgbClr val="FFFFFF"/>
-                </a:solidFill>
-                <a:latin typeface="Poppins"/>
-                <a:ea typeface="Poppins"/>
-                <a:cs typeface="Poppins"/>
-                <a:sym typeface="Poppins"/>
-              </a:rPr>
-              <a:t>fi</a:t>
-            </a:r>
-            <a:r>
-              <a:rPr lang="en-US" sz="2328" strike="noStrike" u="none">
-                <a:solidFill>
-                  <a:srgbClr val="FFFFFF"/>
-                </a:solidFill>
-                <a:latin typeface="Poppins"/>
-                <a:ea typeface="Poppins"/>
-                <a:cs typeface="Poppins"/>
-                <a:sym typeface="Poppins"/>
-              </a:rPr>
-              <a:t>elds and submit</a:t>
-            </a:r>
-            <a:r>
-              <a:rPr lang="en-US" sz="2328" strike="noStrike" u="none">
-                <a:solidFill>
-                  <a:srgbClr val="FFFFFF"/>
-                </a:solidFill>
-                <a:latin typeface="Poppins"/>
-                <a:ea typeface="Poppins"/>
-                <a:cs typeface="Poppins"/>
-                <a:sym typeface="Poppins"/>
-              </a:rPr>
-              <a:t> booking req</a:t>
-            </a:r>
-            <a:r>
-              <a:rPr lang="en-US" sz="2328" strike="noStrike" u="none">
-                <a:solidFill>
-                  <a:srgbClr val="FFFFFF"/>
-                </a:solidFill>
-                <a:latin typeface="Poppins"/>
-                <a:ea typeface="Poppins"/>
-                <a:cs typeface="Poppins"/>
-                <a:sym typeface="Poppins"/>
-              </a:rPr>
-              <a:t>u</a:t>
-            </a:r>
-            <a:r>
-              <a:rPr lang="en-US" sz="2328" strike="noStrike" u="none">
-                <a:solidFill>
-                  <a:srgbClr val="FFFFFF"/>
-                </a:solidFill>
-                <a:latin typeface="Poppins"/>
-                <a:ea typeface="Poppins"/>
-                <a:cs typeface="Poppins"/>
-                <a:sym typeface="Poppins"/>
-              </a:rPr>
-              <a:t>est</a:t>
-            </a:r>
-            <a:r>
-              <a:rPr lang="en-US" sz="2328" strike="noStrike" u="none">
-                <a:solidFill>
-                  <a:srgbClr val="FFFFFF"/>
-                </a:solidFill>
-                <a:latin typeface="Poppins"/>
-                <a:ea typeface="Poppins"/>
-                <a:cs typeface="Poppins"/>
-                <a:sym typeface="Poppins"/>
-              </a:rPr>
-              <a:t>s i</a:t>
-            </a:r>
-            <a:r>
-              <a:rPr lang="en-US" sz="2328" strike="noStrike" u="none">
-                <a:solidFill>
-                  <a:srgbClr val="FFFFFF"/>
-                </a:solidFill>
-                <a:latin typeface="Poppins"/>
-                <a:ea typeface="Poppins"/>
-                <a:cs typeface="Poppins"/>
-                <a:sym typeface="Poppins"/>
-              </a:rPr>
-              <a:t>n </a:t>
-            </a:r>
-            <a:r>
-              <a:rPr lang="en-US" sz="2328" strike="noStrike" u="none">
-                <a:solidFill>
-                  <a:srgbClr val="FFFFFF"/>
-                </a:solidFill>
-                <a:latin typeface="Poppins"/>
-                <a:ea typeface="Poppins"/>
-                <a:cs typeface="Poppins"/>
-                <a:sym typeface="Poppins"/>
-              </a:rPr>
-              <a:t>a</a:t>
-            </a:r>
-            <a:r>
-              <a:rPr lang="en-US" sz="2328" strike="noStrike" u="none">
-                <a:solidFill>
-                  <a:srgbClr val="FFFFFF"/>
-                </a:solidFill>
-                <a:latin typeface="Poppins"/>
-                <a:ea typeface="Poppins"/>
-                <a:cs typeface="Poppins"/>
-                <a:sym typeface="Poppins"/>
-              </a:rPr>
-              <a:t> simpl</a:t>
-            </a:r>
-            <a:r>
-              <a:rPr lang="en-US" sz="2328" strike="noStrike" u="none">
-                <a:solidFill>
-                  <a:srgbClr val="FFFFFF"/>
-                </a:solidFill>
-                <a:latin typeface="Poppins"/>
-                <a:ea typeface="Poppins"/>
-                <a:cs typeface="Poppins"/>
-                <a:sym typeface="Poppins"/>
-              </a:rPr>
-              <a:t>e and confl</a:t>
-            </a:r>
-            <a:r>
-              <a:rPr lang="en-US" sz="2328" strike="noStrike" u="none">
-                <a:solidFill>
-                  <a:srgbClr val="FFFFFF"/>
-                </a:solidFill>
-                <a:latin typeface="Poppins"/>
-                <a:ea typeface="Poppins"/>
-                <a:cs typeface="Poppins"/>
-                <a:sym typeface="Poppins"/>
-              </a:rPr>
-              <a:t>ict-free way.</a:t>
+              <a:t>The goal is to provide a safe, easy-to-use, and efficient solution for managing community sports field reservations.</a:t>
             </a:r>
           </a:p>
           <a:p>
@@ -4505,863 +4228,15 @@
                 <a:spcPts val="3259"/>
               </a:lnSpc>
             </a:pPr>
-            <a:r>
-              <a:rPr lang="en-US" sz="2328" strike="noStrike" u="none">
-                <a:solidFill>
-                  <a:srgbClr val="FFFFFF"/>
-                </a:solidFill>
-                <a:latin typeface="Poppins"/>
-                <a:ea typeface="Poppins"/>
-                <a:cs typeface="Poppins"/>
-                <a:sym typeface="Poppins"/>
-              </a:rPr>
-              <a:t>Un</a:t>
-            </a:r>
-            <a:r>
-              <a:rPr lang="en-US" sz="2328" strike="noStrike" u="none">
-                <a:solidFill>
-                  <a:srgbClr val="FFFFFF"/>
-                </a:solidFill>
-                <a:latin typeface="Poppins"/>
-                <a:ea typeface="Poppins"/>
-                <a:cs typeface="Poppins"/>
-                <a:sym typeface="Poppins"/>
-              </a:rPr>
-              <a:t>like co</a:t>
-            </a:r>
-            <a:r>
-              <a:rPr lang="en-US" sz="2328" strike="noStrike" u="none">
-                <a:solidFill>
-                  <a:srgbClr val="FFFFFF"/>
-                </a:solidFill>
-                <a:latin typeface="Poppins"/>
-                <a:ea typeface="Poppins"/>
-                <a:cs typeface="Poppins"/>
-                <a:sym typeface="Poppins"/>
-              </a:rPr>
-              <a:t>m</a:t>
-            </a:r>
-            <a:r>
-              <a:rPr lang="en-US" sz="2328" strike="noStrike" u="none">
-                <a:solidFill>
-                  <a:srgbClr val="FFFFFF"/>
-                </a:solidFill>
-                <a:latin typeface="Poppins"/>
-                <a:ea typeface="Poppins"/>
-                <a:cs typeface="Poppins"/>
-                <a:sym typeface="Poppins"/>
-              </a:rPr>
-              <a:t>p</a:t>
-            </a:r>
-            <a:r>
-              <a:rPr lang="en-US" sz="2328" strike="noStrike" u="none">
-                <a:solidFill>
-                  <a:srgbClr val="FFFFFF"/>
-                </a:solidFill>
-                <a:latin typeface="Poppins"/>
-                <a:ea typeface="Poppins"/>
-                <a:cs typeface="Poppins"/>
-                <a:sym typeface="Poppins"/>
-              </a:rPr>
-              <a:t>l</a:t>
-            </a:r>
-            <a:r>
-              <a:rPr lang="en-US" sz="2328" strike="noStrike" u="none">
-                <a:solidFill>
-                  <a:srgbClr val="FFFFFF"/>
-                </a:solidFill>
-                <a:latin typeface="Poppins"/>
-                <a:ea typeface="Poppins"/>
-                <a:cs typeface="Poppins"/>
-                <a:sym typeface="Poppins"/>
-              </a:rPr>
-              <a:t>ex </a:t>
-            </a:r>
-            <a:r>
-              <a:rPr lang="en-US" sz="2328" strike="noStrike" u="none">
-                <a:solidFill>
-                  <a:srgbClr val="FFFFFF"/>
-                </a:solidFill>
-                <a:latin typeface="Poppins"/>
-                <a:ea typeface="Poppins"/>
-                <a:cs typeface="Poppins"/>
-                <a:sym typeface="Poppins"/>
-              </a:rPr>
-              <a:t>sched</a:t>
-            </a:r>
-            <a:r>
-              <a:rPr lang="en-US" sz="2328" strike="noStrike" u="none">
-                <a:solidFill>
-                  <a:srgbClr val="FFFFFF"/>
-                </a:solidFill>
-                <a:latin typeface="Poppins"/>
-                <a:ea typeface="Poppins"/>
-                <a:cs typeface="Poppins"/>
-                <a:sym typeface="Poppins"/>
-              </a:rPr>
-              <a:t>u</a:t>
-            </a:r>
-            <a:r>
-              <a:rPr lang="en-US" sz="2328" strike="noStrike" u="none">
-                <a:solidFill>
-                  <a:srgbClr val="FFFFFF"/>
-                </a:solidFill>
-                <a:latin typeface="Poppins"/>
-                <a:ea typeface="Poppins"/>
-                <a:cs typeface="Poppins"/>
-                <a:sym typeface="Poppins"/>
-              </a:rPr>
-              <a:t>ling pla</a:t>
-            </a:r>
-            <a:r>
-              <a:rPr lang="en-US" sz="2328" strike="noStrike" u="none">
-                <a:solidFill>
-                  <a:srgbClr val="FFFFFF"/>
-                </a:solidFill>
-                <a:latin typeface="Poppins"/>
-                <a:ea typeface="Poppins"/>
-                <a:cs typeface="Poppins"/>
-                <a:sym typeface="Poppins"/>
-              </a:rPr>
-              <a:t>t</a:t>
-            </a:r>
-            <a:r>
-              <a:rPr lang="en-US" sz="2328" strike="noStrike" u="none">
-                <a:solidFill>
-                  <a:srgbClr val="FFFFFF"/>
-                </a:solidFill>
-                <a:latin typeface="Poppins"/>
-                <a:ea typeface="Poppins"/>
-                <a:cs typeface="Poppins"/>
-                <a:sym typeface="Poppins"/>
-              </a:rPr>
-              <a:t>fo</a:t>
-            </a:r>
-            <a:r>
-              <a:rPr lang="en-US" sz="2328" strike="noStrike" u="none">
-                <a:solidFill>
-                  <a:srgbClr val="FFFFFF"/>
-                </a:solidFill>
-                <a:latin typeface="Poppins"/>
-                <a:ea typeface="Poppins"/>
-                <a:cs typeface="Poppins"/>
-                <a:sym typeface="Poppins"/>
-              </a:rPr>
-              <a:t>rm</a:t>
-            </a:r>
-            <a:r>
-              <a:rPr lang="en-US" sz="2328" strike="noStrike" u="none">
-                <a:solidFill>
-                  <a:srgbClr val="FFFFFF"/>
-                </a:solidFill>
-                <a:latin typeface="Poppins"/>
-                <a:ea typeface="Poppins"/>
-                <a:cs typeface="Poppins"/>
-                <a:sym typeface="Poppins"/>
-              </a:rPr>
-              <a:t>s or phone calls</a:t>
-            </a:r>
-            <a:r>
-              <a:rPr lang="en-US" sz="2328" strike="noStrike" u="none">
-                <a:solidFill>
-                  <a:srgbClr val="FFFFFF"/>
-                </a:solidFill>
-                <a:latin typeface="Poppins"/>
-                <a:ea typeface="Poppins"/>
-                <a:cs typeface="Poppins"/>
-                <a:sym typeface="Poppins"/>
-              </a:rPr>
-              <a:t>, </a:t>
-            </a:r>
-            <a:r>
-              <a:rPr lang="en-US" sz="2328" strike="noStrike" u="none">
-                <a:solidFill>
-                  <a:srgbClr val="FFFFFF"/>
-                </a:solidFill>
-                <a:latin typeface="Poppins"/>
-                <a:ea typeface="Poppins"/>
-                <a:cs typeface="Poppins"/>
-                <a:sym typeface="Poppins"/>
-              </a:rPr>
-              <a:t>o</a:t>
-            </a:r>
-            <a:r>
-              <a:rPr lang="en-US" sz="2328" strike="noStrike" u="none">
-                <a:solidFill>
-                  <a:srgbClr val="FFFFFF"/>
-                </a:solidFill>
-                <a:latin typeface="Poppins"/>
-                <a:ea typeface="Poppins"/>
-                <a:cs typeface="Poppins"/>
-                <a:sym typeface="Poppins"/>
-              </a:rPr>
-              <a:t>ur</a:t>
-            </a:r>
-            <a:r>
-              <a:rPr lang="en-US" sz="2328" strike="noStrike" u="none">
-                <a:solidFill>
-                  <a:srgbClr val="FFFFFF"/>
-                </a:solidFill>
-                <a:latin typeface="Poppins"/>
-                <a:ea typeface="Poppins"/>
-                <a:cs typeface="Poppins"/>
-                <a:sym typeface="Poppins"/>
-              </a:rPr>
-              <a:t> system foc</a:t>
-            </a:r>
-            <a:r>
-              <a:rPr lang="en-US" sz="2328" strike="noStrike" u="none">
-                <a:solidFill>
-                  <a:srgbClr val="FFFFFF"/>
-                </a:solidFill>
-                <a:latin typeface="Poppins"/>
-                <a:ea typeface="Poppins"/>
-                <a:cs typeface="Poppins"/>
-                <a:sym typeface="Poppins"/>
-              </a:rPr>
-              <a:t>uses on:</a:t>
-            </a:r>
-          </a:p>
-          <a:p>
-            <a:pPr algn="just" marL="502716" indent="-251358" lvl="1">
-              <a:lnSpc>
-                <a:spcPts val="3259"/>
-              </a:lnSpc>
-              <a:buFont typeface="Arial"/>
-              <a:buChar char="•"/>
-            </a:pPr>
-            <a:r>
-              <a:rPr lang="en-US" sz="2328" strike="noStrike" u="none">
-                <a:solidFill>
-                  <a:srgbClr val="FFFFFF"/>
-                </a:solidFill>
-                <a:latin typeface="Poppins"/>
-                <a:ea typeface="Poppins"/>
-                <a:cs typeface="Poppins"/>
-                <a:sym typeface="Poppins"/>
-              </a:rPr>
-              <a:t>Simp</a:t>
-            </a:r>
-            <a:r>
-              <a:rPr lang="en-US" sz="2328" strike="noStrike" u="none">
-                <a:solidFill>
-                  <a:srgbClr val="FFFFFF"/>
-                </a:solidFill>
-                <a:latin typeface="Poppins"/>
-                <a:ea typeface="Poppins"/>
-                <a:cs typeface="Poppins"/>
-                <a:sym typeface="Poppins"/>
-              </a:rPr>
-              <a:t>lified </a:t>
-            </a:r>
-            <a:r>
-              <a:rPr lang="en-US" sz="2328" strike="noStrike" u="none">
-                <a:solidFill>
-                  <a:srgbClr val="FFFFFF"/>
-                </a:solidFill>
-                <a:latin typeface="Poppins"/>
-                <a:ea typeface="Poppins"/>
-                <a:cs typeface="Poppins"/>
-                <a:sym typeface="Poppins"/>
-              </a:rPr>
-              <a:t>r</a:t>
-            </a:r>
-            <a:r>
-              <a:rPr lang="en-US" sz="2328" strike="noStrike" u="none">
-                <a:solidFill>
-                  <a:srgbClr val="FFFFFF"/>
-                </a:solidFill>
-                <a:latin typeface="Poppins"/>
-                <a:ea typeface="Poppins"/>
-                <a:cs typeface="Poppins"/>
-                <a:sym typeface="Poppins"/>
-              </a:rPr>
-              <a:t>e</a:t>
-            </a:r>
-            <a:r>
-              <a:rPr lang="en-US" sz="2328" strike="noStrike" u="none">
-                <a:solidFill>
-                  <a:srgbClr val="FFFFFF"/>
-                </a:solidFill>
-                <a:latin typeface="Poppins"/>
-                <a:ea typeface="Poppins"/>
-                <a:cs typeface="Poppins"/>
-                <a:sym typeface="Poppins"/>
-              </a:rPr>
-              <a:t>s</a:t>
-            </a:r>
-            <a:r>
-              <a:rPr lang="en-US" sz="2328" strike="noStrike" u="none">
-                <a:solidFill>
-                  <a:srgbClr val="FFFFFF"/>
-                </a:solidFill>
-                <a:latin typeface="Poppins"/>
-                <a:ea typeface="Poppins"/>
-                <a:cs typeface="Poppins"/>
-                <a:sym typeface="Poppins"/>
-              </a:rPr>
-              <a:t>e</a:t>
-            </a:r>
-            <a:r>
-              <a:rPr lang="en-US" sz="2328" strike="noStrike" u="none">
-                <a:solidFill>
-                  <a:srgbClr val="FFFFFF"/>
-                </a:solidFill>
-                <a:latin typeface="Poppins"/>
-                <a:ea typeface="Poppins"/>
-                <a:cs typeface="Poppins"/>
-                <a:sym typeface="Poppins"/>
-              </a:rPr>
-              <a:t>r</a:t>
-            </a:r>
-            <a:r>
-              <a:rPr lang="en-US" sz="2328" strike="noStrike" u="none">
-                <a:solidFill>
-                  <a:srgbClr val="FFFFFF"/>
-                </a:solidFill>
-                <a:latin typeface="Poppins"/>
-                <a:ea typeface="Poppins"/>
-                <a:cs typeface="Poppins"/>
-                <a:sym typeface="Poppins"/>
-              </a:rPr>
-              <a:t>va</a:t>
-            </a:r>
-            <a:r>
-              <a:rPr lang="en-US" sz="2328" strike="noStrike" u="none">
-                <a:solidFill>
-                  <a:srgbClr val="FFFFFF"/>
-                </a:solidFill>
-                <a:latin typeface="Poppins"/>
-                <a:ea typeface="Poppins"/>
-                <a:cs typeface="Poppins"/>
-                <a:sym typeface="Poppins"/>
-              </a:rPr>
-              <a:t>tio</a:t>
-            </a:r>
-            <a:r>
-              <a:rPr lang="en-US" sz="2328" strike="noStrike" u="none">
-                <a:solidFill>
-                  <a:srgbClr val="FFFFFF"/>
-                </a:solidFill>
-                <a:latin typeface="Poppins"/>
-                <a:ea typeface="Poppins"/>
-                <a:cs typeface="Poppins"/>
-                <a:sym typeface="Poppins"/>
-              </a:rPr>
-              <a:t>n</a:t>
-            </a:r>
-            <a:r>
-              <a:rPr lang="en-US" sz="2328" strike="noStrike" u="none">
-                <a:solidFill>
-                  <a:srgbClr val="FFFFFF"/>
-                </a:solidFill>
-                <a:latin typeface="Poppins"/>
-                <a:ea typeface="Poppins"/>
-                <a:cs typeface="Poppins"/>
-                <a:sym typeface="Poppins"/>
-              </a:rPr>
-              <a:t>s</a:t>
-            </a:r>
-          </a:p>
-          <a:p>
-            <a:pPr algn="just" marL="502716" indent="-251358" lvl="1">
-              <a:lnSpc>
-                <a:spcPts val="3259"/>
-              </a:lnSpc>
-              <a:buFont typeface="Arial"/>
-              <a:buChar char="•"/>
-            </a:pPr>
-            <a:r>
-              <a:rPr lang="en-US" sz="2328" strike="noStrike" u="none">
-                <a:solidFill>
-                  <a:srgbClr val="FFFFFF"/>
-                </a:solidFill>
-                <a:latin typeface="Poppins"/>
-                <a:ea typeface="Poppins"/>
-                <a:cs typeface="Poppins"/>
-                <a:sym typeface="Poppins"/>
-              </a:rPr>
-              <a:t>Cle</a:t>
-            </a:r>
-            <a:r>
-              <a:rPr lang="en-US" sz="2328" strike="noStrike" u="none">
-                <a:solidFill>
-                  <a:srgbClr val="FFFFFF"/>
-                </a:solidFill>
-                <a:latin typeface="Poppins"/>
-                <a:ea typeface="Poppins"/>
-                <a:cs typeface="Poppins"/>
-                <a:sym typeface="Poppins"/>
-              </a:rPr>
-              <a:t>ar field availabilit</a:t>
-            </a:r>
-            <a:r>
-              <a:rPr lang="en-US" sz="2328" strike="noStrike" u="none">
-                <a:solidFill>
-                  <a:srgbClr val="FFFFFF"/>
-                </a:solidFill>
-                <a:latin typeface="Poppins"/>
-                <a:ea typeface="Poppins"/>
-                <a:cs typeface="Poppins"/>
-                <a:sym typeface="Poppins"/>
-              </a:rPr>
-              <a:t>y</a:t>
-            </a:r>
-          </a:p>
-          <a:p>
-            <a:pPr algn="just" marL="502716" indent="-251358" lvl="1">
-              <a:lnSpc>
-                <a:spcPts val="3259"/>
-              </a:lnSpc>
-              <a:buFont typeface="Arial"/>
-              <a:buChar char="•"/>
-            </a:pPr>
-            <a:r>
-              <a:rPr lang="en-US" sz="2328" strike="noStrike" u="none">
-                <a:solidFill>
-                  <a:srgbClr val="FFFFFF"/>
-                </a:solidFill>
-                <a:latin typeface="Poppins"/>
-                <a:ea typeface="Poppins"/>
-                <a:cs typeface="Poppins"/>
-                <a:sym typeface="Poppins"/>
-              </a:rPr>
-              <a:t>Pe</a:t>
-            </a:r>
-            <a:r>
-              <a:rPr lang="en-US" sz="2328" strike="noStrike" u="none">
-                <a:solidFill>
-                  <a:srgbClr val="FFFFFF"/>
-                </a:solidFill>
-                <a:latin typeface="Poppins"/>
-                <a:ea typeface="Poppins"/>
-                <a:cs typeface="Poppins"/>
-                <a:sym typeface="Poppins"/>
-              </a:rPr>
-              <a:t>r</a:t>
-            </a:r>
-            <a:r>
-              <a:rPr lang="en-US" sz="2328" strike="noStrike" u="none">
-                <a:solidFill>
-                  <a:srgbClr val="FFFFFF"/>
-                </a:solidFill>
-                <a:latin typeface="Poppins"/>
-                <a:ea typeface="Poppins"/>
-                <a:cs typeface="Poppins"/>
-                <a:sym typeface="Poppins"/>
-              </a:rPr>
-              <a:t>s</a:t>
-            </a:r>
-            <a:r>
-              <a:rPr lang="en-US" sz="2328" strike="noStrike" u="none">
-                <a:solidFill>
-                  <a:srgbClr val="FFFFFF"/>
-                </a:solidFill>
-                <a:latin typeface="Poppins"/>
-                <a:ea typeface="Poppins"/>
-                <a:cs typeface="Poppins"/>
-                <a:sym typeface="Poppins"/>
-              </a:rPr>
-              <a:t>istent us</a:t>
-            </a:r>
-            <a:r>
-              <a:rPr lang="en-US" sz="2328" strike="noStrike" u="none">
-                <a:solidFill>
-                  <a:srgbClr val="FFFFFF"/>
-                </a:solidFill>
-                <a:latin typeface="Poppins"/>
-                <a:ea typeface="Poppins"/>
-                <a:cs typeface="Poppins"/>
-                <a:sym typeface="Poppins"/>
-              </a:rPr>
-              <a:t>er</a:t>
-            </a:r>
-            <a:r>
-              <a:rPr lang="en-US" sz="2328" strike="noStrike" u="none">
-                <a:solidFill>
-                  <a:srgbClr val="FFFFFF"/>
-                </a:solidFill>
-                <a:latin typeface="Poppins"/>
-                <a:ea typeface="Poppins"/>
-                <a:cs typeface="Poppins"/>
-                <a:sym typeface="Poppins"/>
-              </a:rPr>
-              <a:t> sel</a:t>
-            </a:r>
-            <a:r>
-              <a:rPr lang="en-US" sz="2328" strike="noStrike" u="none">
-                <a:solidFill>
-                  <a:srgbClr val="FFFFFF"/>
-                </a:solidFill>
-                <a:latin typeface="Poppins"/>
-                <a:ea typeface="Poppins"/>
-                <a:cs typeface="Poppins"/>
-                <a:sym typeface="Poppins"/>
-              </a:rPr>
-              <a:t>ecti</a:t>
-            </a:r>
-            <a:r>
-              <a:rPr lang="en-US" sz="2328" strike="noStrike" u="none">
-                <a:solidFill>
-                  <a:srgbClr val="FFFFFF"/>
-                </a:solidFill>
-                <a:latin typeface="Poppins"/>
-                <a:ea typeface="Poppins"/>
-                <a:cs typeface="Poppins"/>
-                <a:sym typeface="Poppins"/>
-              </a:rPr>
-              <a:t>ons</a:t>
-            </a:r>
-          </a:p>
-          <a:p>
-            <a:pPr algn="just">
-              <a:lnSpc>
-                <a:spcPts val="3259"/>
-              </a:lnSpc>
-            </a:pPr>
-            <a:r>
-              <a:rPr lang="en-US" sz="2328" strike="noStrike" u="none">
-                <a:solidFill>
-                  <a:srgbClr val="FFFFFF"/>
-                </a:solidFill>
-                <a:latin typeface="Poppins"/>
-                <a:ea typeface="Poppins"/>
-                <a:cs typeface="Poppins"/>
-                <a:sym typeface="Poppins"/>
-              </a:rPr>
-              <a:t>Th</a:t>
-            </a:r>
-            <a:r>
-              <a:rPr lang="en-US" sz="2328" strike="noStrike" u="none">
-                <a:solidFill>
-                  <a:srgbClr val="FFFFFF"/>
-                </a:solidFill>
-                <a:latin typeface="Poppins"/>
-                <a:ea typeface="Poppins"/>
-                <a:cs typeface="Poppins"/>
-                <a:sym typeface="Poppins"/>
-              </a:rPr>
-              <a:t>e </a:t>
-            </a:r>
-            <a:r>
-              <a:rPr lang="en-US" sz="2328" strike="noStrike" u="none">
-                <a:solidFill>
-                  <a:srgbClr val="FFFFFF"/>
-                </a:solidFill>
-                <a:latin typeface="Poppins"/>
-                <a:ea typeface="Poppins"/>
-                <a:cs typeface="Poppins"/>
-                <a:sym typeface="Poppins"/>
-              </a:rPr>
-              <a:t>goal </a:t>
-            </a:r>
-            <a:r>
-              <a:rPr lang="en-US" sz="2328" strike="noStrike" u="none">
-                <a:solidFill>
-                  <a:srgbClr val="FFFFFF"/>
-                </a:solidFill>
-                <a:latin typeface="Poppins"/>
-                <a:ea typeface="Poppins"/>
-                <a:cs typeface="Poppins"/>
-                <a:sym typeface="Poppins"/>
-              </a:rPr>
-              <a:t>is</a:t>
-            </a:r>
-            <a:r>
-              <a:rPr lang="en-US" sz="2328" strike="noStrike" u="none">
-                <a:solidFill>
-                  <a:srgbClr val="FFFFFF"/>
-                </a:solidFill>
-                <a:latin typeface="Poppins"/>
-                <a:ea typeface="Poppins"/>
-                <a:cs typeface="Poppins"/>
-                <a:sym typeface="Poppins"/>
-              </a:rPr>
-              <a:t> to</a:t>
-            </a:r>
-            <a:r>
-              <a:rPr lang="en-US" sz="2328" strike="noStrike" u="none">
-                <a:solidFill>
-                  <a:srgbClr val="FFFFFF"/>
-                </a:solidFill>
-                <a:latin typeface="Poppins"/>
-                <a:ea typeface="Poppins"/>
-                <a:cs typeface="Poppins"/>
-                <a:sym typeface="Poppins"/>
-              </a:rPr>
-              <a:t> provi</a:t>
-            </a:r>
-            <a:r>
-              <a:rPr lang="en-US" sz="2328" strike="noStrike" u="none">
-                <a:solidFill>
-                  <a:srgbClr val="FFFFFF"/>
-                </a:solidFill>
-                <a:latin typeface="Poppins"/>
-                <a:ea typeface="Poppins"/>
-                <a:cs typeface="Poppins"/>
-                <a:sym typeface="Poppins"/>
-              </a:rPr>
-              <a:t>de a safe,</a:t>
-            </a:r>
-            <a:r>
-              <a:rPr lang="en-US" sz="2328" strike="noStrike" u="none">
-                <a:solidFill>
-                  <a:srgbClr val="FFFFFF"/>
-                </a:solidFill>
-                <a:latin typeface="Poppins"/>
-                <a:ea typeface="Poppins"/>
-                <a:cs typeface="Poppins"/>
-                <a:sym typeface="Poppins"/>
-              </a:rPr>
-              <a:t> e</a:t>
-            </a:r>
-            <a:r>
-              <a:rPr lang="en-US" sz="2328" strike="noStrike" u="none">
-                <a:solidFill>
-                  <a:srgbClr val="FFFFFF"/>
-                </a:solidFill>
-                <a:latin typeface="Poppins"/>
-                <a:ea typeface="Poppins"/>
-                <a:cs typeface="Poppins"/>
-                <a:sym typeface="Poppins"/>
-              </a:rPr>
-              <a:t>asy-</a:t>
-            </a:r>
-            <a:r>
-              <a:rPr lang="en-US" sz="2328" strike="noStrike" u="none">
-                <a:solidFill>
-                  <a:srgbClr val="FFFFFF"/>
-                </a:solidFill>
-                <a:latin typeface="Poppins"/>
-                <a:ea typeface="Poppins"/>
-                <a:cs typeface="Poppins"/>
-                <a:sym typeface="Poppins"/>
-              </a:rPr>
-              <a:t>t</a:t>
-            </a:r>
-            <a:r>
-              <a:rPr lang="en-US" sz="2328" strike="noStrike" u="none">
-                <a:solidFill>
-                  <a:srgbClr val="FFFFFF"/>
-                </a:solidFill>
-                <a:latin typeface="Poppins"/>
-                <a:ea typeface="Poppins"/>
-                <a:cs typeface="Poppins"/>
-                <a:sym typeface="Poppins"/>
-              </a:rPr>
-              <a:t>o-use,</a:t>
-            </a:r>
-            <a:r>
-              <a:rPr lang="en-US" sz="2328" strike="noStrike" u="none">
-                <a:solidFill>
-                  <a:srgbClr val="FFFFFF"/>
-                </a:solidFill>
-                <a:latin typeface="Poppins"/>
-                <a:ea typeface="Poppins"/>
-                <a:cs typeface="Poppins"/>
-                <a:sym typeface="Poppins"/>
-              </a:rPr>
-              <a:t> a</a:t>
-            </a:r>
-            <a:r>
-              <a:rPr lang="en-US" sz="2328" strike="noStrike" u="none">
-                <a:solidFill>
-                  <a:srgbClr val="FFFFFF"/>
-                </a:solidFill>
-                <a:latin typeface="Poppins"/>
-                <a:ea typeface="Poppins"/>
-                <a:cs typeface="Poppins"/>
-                <a:sym typeface="Poppins"/>
-              </a:rPr>
-              <a:t>nd effi</a:t>
-            </a:r>
-            <a:r>
-              <a:rPr lang="en-US" sz="2328" strike="noStrike" u="none">
-                <a:solidFill>
-                  <a:srgbClr val="FFFFFF"/>
-                </a:solidFill>
-                <a:latin typeface="Poppins"/>
-                <a:ea typeface="Poppins"/>
-                <a:cs typeface="Poppins"/>
-                <a:sym typeface="Poppins"/>
-              </a:rPr>
-              <a:t>ci</a:t>
-            </a:r>
-            <a:r>
-              <a:rPr lang="en-US" sz="2328" strike="noStrike" u="none">
-                <a:solidFill>
-                  <a:srgbClr val="FFFFFF"/>
-                </a:solidFill>
-                <a:latin typeface="Poppins"/>
-                <a:ea typeface="Poppins"/>
-                <a:cs typeface="Poppins"/>
-                <a:sym typeface="Poppins"/>
-              </a:rPr>
-              <a:t>e</a:t>
-            </a:r>
-            <a:r>
-              <a:rPr lang="en-US" sz="2328" strike="noStrike" u="none">
-                <a:solidFill>
-                  <a:srgbClr val="FFFFFF"/>
-                </a:solidFill>
-                <a:latin typeface="Poppins"/>
-                <a:ea typeface="Poppins"/>
-                <a:cs typeface="Poppins"/>
-                <a:sym typeface="Poppins"/>
-              </a:rPr>
-              <a:t>n</a:t>
-            </a:r>
-            <a:r>
-              <a:rPr lang="en-US" sz="2328" strike="noStrike" u="none">
-                <a:solidFill>
-                  <a:srgbClr val="FFFFFF"/>
-                </a:solidFill>
-                <a:latin typeface="Poppins"/>
-                <a:ea typeface="Poppins"/>
-                <a:cs typeface="Poppins"/>
-                <a:sym typeface="Poppins"/>
-              </a:rPr>
-              <a:t>t solut</a:t>
-            </a:r>
-            <a:r>
-              <a:rPr lang="en-US" sz="2328" strike="noStrike" u="none">
-                <a:solidFill>
-                  <a:srgbClr val="FFFFFF"/>
-                </a:solidFill>
-                <a:latin typeface="Poppins"/>
-                <a:ea typeface="Poppins"/>
-                <a:cs typeface="Poppins"/>
-                <a:sym typeface="Poppins"/>
-              </a:rPr>
-              <a:t>i</a:t>
-            </a:r>
-            <a:r>
-              <a:rPr lang="en-US" sz="2328" strike="noStrike" u="none">
-                <a:solidFill>
-                  <a:srgbClr val="FFFFFF"/>
-                </a:solidFill>
-                <a:latin typeface="Poppins"/>
-                <a:ea typeface="Poppins"/>
-                <a:cs typeface="Poppins"/>
-                <a:sym typeface="Poppins"/>
-              </a:rPr>
-              <a:t>on for m</a:t>
-            </a:r>
-            <a:r>
-              <a:rPr lang="en-US" sz="2328" strike="noStrike" u="none">
-                <a:solidFill>
-                  <a:srgbClr val="FFFFFF"/>
-                </a:solidFill>
-                <a:latin typeface="Poppins"/>
-                <a:ea typeface="Poppins"/>
-                <a:cs typeface="Poppins"/>
-                <a:sym typeface="Poppins"/>
-              </a:rPr>
-              <a:t>anaging c</a:t>
-            </a:r>
-            <a:r>
-              <a:rPr lang="en-US" sz="2328" strike="noStrike" u="none">
-                <a:solidFill>
-                  <a:srgbClr val="FFFFFF"/>
-                </a:solidFill>
-                <a:latin typeface="Poppins"/>
-                <a:ea typeface="Poppins"/>
-                <a:cs typeface="Poppins"/>
-                <a:sym typeface="Poppins"/>
-              </a:rPr>
-              <a:t>ommuni</a:t>
-            </a:r>
-            <a:r>
-              <a:rPr lang="en-US" sz="2328" strike="noStrike" u="none">
-                <a:solidFill>
-                  <a:srgbClr val="FFFFFF"/>
-                </a:solidFill>
-                <a:latin typeface="Poppins"/>
-                <a:ea typeface="Poppins"/>
-                <a:cs typeface="Poppins"/>
-                <a:sym typeface="Poppins"/>
-              </a:rPr>
-              <a:t>t</a:t>
-            </a:r>
-            <a:r>
-              <a:rPr lang="en-US" sz="2328" strike="noStrike" u="none">
-                <a:solidFill>
-                  <a:srgbClr val="FFFFFF"/>
-                </a:solidFill>
-                <a:latin typeface="Poppins"/>
-                <a:ea typeface="Poppins"/>
-                <a:cs typeface="Poppins"/>
-                <a:sym typeface="Poppins"/>
-              </a:rPr>
-              <a:t>y </a:t>
-            </a:r>
-            <a:r>
-              <a:rPr lang="en-US" sz="2328" strike="noStrike" u="none">
-                <a:solidFill>
-                  <a:srgbClr val="FFFFFF"/>
-                </a:solidFill>
-                <a:latin typeface="Poppins"/>
-                <a:ea typeface="Poppins"/>
-                <a:cs typeface="Poppins"/>
-                <a:sym typeface="Poppins"/>
-              </a:rPr>
-              <a:t>sports field </a:t>
-            </a:r>
-            <a:r>
-              <a:rPr lang="en-US" sz="2328" strike="noStrike" u="none">
-                <a:solidFill>
-                  <a:srgbClr val="FFFFFF"/>
-                </a:solidFill>
-                <a:latin typeface="Poppins"/>
-                <a:ea typeface="Poppins"/>
-                <a:cs typeface="Poppins"/>
-                <a:sym typeface="Poppins"/>
-              </a:rPr>
-              <a:t>reserva</a:t>
-            </a:r>
-            <a:r>
-              <a:rPr lang="en-US" sz="2328" strike="noStrike" u="none">
-                <a:solidFill>
-                  <a:srgbClr val="FFFFFF"/>
-                </a:solidFill>
-                <a:latin typeface="Poppins"/>
-                <a:ea typeface="Poppins"/>
-                <a:cs typeface="Poppins"/>
-                <a:sym typeface="Poppins"/>
-              </a:rPr>
-              <a:t>ti</a:t>
-            </a:r>
-            <a:r>
-              <a:rPr lang="en-US" sz="2328" strike="noStrike" u="none">
-                <a:solidFill>
-                  <a:srgbClr val="FFFFFF"/>
-                </a:solidFill>
-                <a:latin typeface="Poppins"/>
-                <a:ea typeface="Poppins"/>
-                <a:cs typeface="Poppins"/>
-                <a:sym typeface="Poppins"/>
-              </a:rPr>
-              <a:t>ons</a:t>
-            </a:r>
-            <a:r>
-              <a:rPr lang="en-US" sz="2328" strike="noStrike" u="none">
-                <a:solidFill>
-                  <a:srgbClr val="FFFFFF"/>
-                </a:solidFill>
-                <a:latin typeface="Poppins"/>
-                <a:ea typeface="Poppins"/>
-                <a:cs typeface="Poppins"/>
-                <a:sym typeface="Poppins"/>
-              </a:rPr>
-              <a:t>.</a:t>
-            </a:r>
-          </a:p>
-          <a:p>
-            <a:pPr algn="just">
-              <a:lnSpc>
-                <a:spcPts val="3259"/>
-              </a:lnSpc>
-            </a:pPr>
+            <a:endParaRPr lang="en-US" sz="2328" u="none" strike="noStrike">
+              <a:solidFill>
+                <a:srgbClr val="FFFFFF"/>
+              </a:solidFill>
+              <a:latin typeface="Poppins"/>
+              <a:ea typeface="Poppins"/>
+              <a:cs typeface="Poppins"/>
+              <a:sym typeface="Poppins"/>
+            </a:endParaRPr>
           </a:p>
         </p:txBody>
       </p:sp>
@@ -5374,13 +4249,14 @@
 </file>
 
 <file path=ppt/slides/slide3.xml><?xml version="1.0" encoding="utf-8"?>
-<p:sld xmlns:p="http://schemas.openxmlformats.org/presentationml/2006/main" xmlns:a="http://schemas.openxmlformats.org/drawingml/2006/main" xmlns:r="http://schemas.openxmlformats.org/officeDocument/2006/relationships">
+<p:sld xmlns:a="http://schemas.openxmlformats.org/drawingml/2006/main" xmlns:r="http://schemas.openxmlformats.org/officeDocument/2006/relationships" xmlns:p="http://schemas.openxmlformats.org/presentationml/2006/main">
   <p:cSld>
     <p:bg>
       <p:bgPr>
         <a:solidFill>
           <a:srgbClr val="17244D"/>
         </a:solidFill>
+        <a:effectLst/>
       </p:bgPr>
     </p:bg>
     <p:spTree>
@@ -5399,12 +4275,12 @@
       </p:grpSpPr>
       <p:sp>
         <p:nvSpPr>
-          <p:cNvPr name="TextBox 2" id="2"/>
-          <p:cNvSpPr txBox="true"/>
+          <p:cNvPr id="2" name="TextBox 2"/>
+          <p:cNvSpPr txBox="1"/>
           <p:nvPr/>
         </p:nvSpPr>
         <p:spPr>
-          <a:xfrm rot="0">
+          <a:xfrm>
             <a:off x="4616080" y="2991113"/>
             <a:ext cx="9055839" cy="866775"/>
           </a:xfrm>
@@ -5413,12 +4289,12 @@
           </a:prstGeom>
         </p:spPr>
         <p:txBody>
-          <a:bodyPr anchor="t" rtlCol="false" tIns="0" lIns="0" bIns="0" rIns="0">
+          <a:bodyPr lIns="0" tIns="0" rIns="0" bIns="0" rtlCol="0" anchor="t">
             <a:spAutoFit/>
           </a:bodyPr>
           <a:lstStyle/>
           <a:p>
-            <a:pPr algn="ctr" marL="0" indent="0" lvl="0">
+            <a:pPr marL="0" lvl="0" indent="0" algn="ctr">
               <a:lnSpc>
                 <a:spcPts val="6450"/>
               </a:lnSpc>
@@ -5439,7 +4315,7 @@
               <a:t>H</a:t>
             </a:r>
             <a:r>
-              <a:rPr lang="en-US" sz="5000" strike="noStrike" u="none">
+              <a:rPr lang="en-US" sz="5000" u="none" strike="noStrike">
                 <a:solidFill>
                   <a:srgbClr val="FFFFFF"/>
                 </a:solidFill>
@@ -5448,79 +4324,19 @@
                 <a:cs typeface="Lastica"/>
                 <a:sym typeface="Lastica"/>
               </a:rPr>
-              <a:t>o</a:t>
-            </a:r>
-            <a:r>
-              <a:rPr lang="en-US" sz="5000" strike="noStrike" u="none">
-                <a:solidFill>
-                  <a:srgbClr val="FFFFFF"/>
-                </a:solidFill>
-                <a:latin typeface="Lastica"/>
-                <a:ea typeface="Lastica"/>
-                <a:cs typeface="Lastica"/>
-                <a:sym typeface="Lastica"/>
-              </a:rPr>
-              <a:t>w</a:t>
-            </a:r>
-            <a:r>
-              <a:rPr lang="en-US" sz="5000" strike="noStrike" u="none">
-                <a:solidFill>
-                  <a:srgbClr val="FFFFFF"/>
-                </a:solidFill>
-                <a:latin typeface="Lastica"/>
-                <a:ea typeface="Lastica"/>
-                <a:cs typeface="Lastica"/>
-                <a:sym typeface="Lastica"/>
-              </a:rPr>
-              <a:t> </a:t>
-            </a:r>
-            <a:r>
-              <a:rPr lang="en-US" sz="5000" strike="noStrike" u="none">
-                <a:solidFill>
-                  <a:srgbClr val="FFFFFF"/>
-                </a:solidFill>
-                <a:latin typeface="Lastica"/>
-                <a:ea typeface="Lastica"/>
-                <a:cs typeface="Lastica"/>
-                <a:sym typeface="Lastica"/>
-              </a:rPr>
-              <a:t>W</a:t>
-            </a:r>
-            <a:r>
-              <a:rPr lang="en-US" sz="5000" strike="noStrike" u="none">
-                <a:solidFill>
-                  <a:srgbClr val="FFFFFF"/>
-                </a:solidFill>
-                <a:latin typeface="Lastica"/>
-                <a:ea typeface="Lastica"/>
-                <a:cs typeface="Lastica"/>
-                <a:sym typeface="Lastica"/>
-              </a:rPr>
-              <a:t>ill</a:t>
-            </a:r>
-            <a:r>
-              <a:rPr lang="en-US" sz="5000" strike="noStrike" u="none">
-                <a:solidFill>
-                  <a:srgbClr val="FFFFFF"/>
-                </a:solidFill>
-                <a:latin typeface="Lastica"/>
-                <a:ea typeface="Lastica"/>
-                <a:cs typeface="Lastica"/>
-                <a:sym typeface="Lastica"/>
-              </a:rPr>
-              <a:t> It Work?</a:t>
+              <a:t>ow Will It Work?</a:t>
             </a:r>
           </a:p>
         </p:txBody>
       </p:sp>
       <p:grpSp>
         <p:nvGrpSpPr>
-          <p:cNvPr name="Group 3" id="3"/>
+          <p:cNvPr id="3" name="Group 3"/>
           <p:cNvGrpSpPr/>
           <p:nvPr/>
         </p:nvGrpSpPr>
         <p:grpSpPr>
-          <a:xfrm rot="0">
+          <a:xfrm>
             <a:off x="1870963" y="4514590"/>
             <a:ext cx="4562894" cy="1442531"/>
             <a:chOff x="0" y="0"/>
@@ -5529,12 +4345,12 @@
         </p:grpSpPr>
         <p:sp>
           <p:nvSpPr>
-            <p:cNvPr name="Freeform 4" id="4"/>
+            <p:cNvPr id="4" name="Freeform 4"/>
             <p:cNvSpPr/>
             <p:nvPr/>
           </p:nvSpPr>
           <p:spPr>
-            <a:xfrm flipH="false" flipV="false" rot="0">
+            <a:xfrm>
               <a:off x="0" y="0"/>
               <a:ext cx="1695573" cy="536045"/>
             </a:xfrm>
@@ -5543,9 +4359,9 @@
               <a:gdLst/>
               <a:ahLst/>
               <a:cxnLst/>
-              <a:rect r="r" b="b" t="t" l="l"/>
+              <a:rect l="l" t="t" r="r" b="b"/>
               <a:pathLst>
-                <a:path h="536045" w="1695573">
+                <a:path w="1695573" h="536045">
                   <a:moveTo>
                     <a:pt x="1492373" y="0"/>
                   </a:moveTo>
@@ -5584,11 +4400,18 @@
               <a:miter/>
             </a:ln>
           </p:spPr>
+          <p:txBody>
+            <a:bodyPr/>
+            <a:lstStyle/>
+            <a:p>
+              <a:endParaRPr lang="en-AE"/>
+            </a:p>
+          </p:txBody>
         </p:sp>
         <p:sp>
           <p:nvSpPr>
-            <p:cNvPr name="TextBox 5" id="5"/>
-            <p:cNvSpPr txBox="true"/>
+            <p:cNvPr id="5" name="TextBox 5"/>
+            <p:cNvSpPr txBox="1"/>
             <p:nvPr/>
           </p:nvSpPr>
           <p:spPr>
@@ -5601,7 +4424,7 @@
             </a:prstGeom>
           </p:spPr>
           <p:txBody>
-            <a:bodyPr anchor="ctr" rtlCol="false" tIns="50800" lIns="50800" bIns="50800" rIns="50800"/>
+            <a:bodyPr lIns="50800" tIns="50800" rIns="50800" bIns="50800" rtlCol="0" anchor="ctr"/>
             <a:lstStyle/>
             <a:p>
               <a:pPr algn="ctr">
@@ -5609,18 +4432,19 @@
                   <a:spcPts val="2659"/>
                 </a:lnSpc>
               </a:pPr>
+              <a:endParaRPr/>
             </a:p>
           </p:txBody>
         </p:sp>
       </p:grpSp>
       <p:sp>
         <p:nvSpPr>
-          <p:cNvPr name="TextBox 6" id="6"/>
-          <p:cNvSpPr txBox="true"/>
+          <p:cNvPr id="6" name="TextBox 6"/>
+          <p:cNvSpPr txBox="1"/>
           <p:nvPr/>
         </p:nvSpPr>
         <p:spPr>
-          <a:xfrm rot="0">
+          <a:xfrm>
             <a:off x="2084032" y="4556589"/>
             <a:ext cx="4140418" cy="1317625"/>
           </a:xfrm>
@@ -5629,7 +4453,7 @@
           </a:prstGeom>
         </p:spPr>
         <p:txBody>
-          <a:bodyPr anchor="t" rtlCol="false" tIns="0" lIns="0" bIns="0" rIns="0">
+          <a:bodyPr lIns="0" tIns="0" rIns="0" bIns="0" rtlCol="0" anchor="t">
             <a:spAutoFit/>
           </a:bodyPr>
           <a:lstStyle/>
@@ -5652,31 +4476,19 @@
                 <a:cs typeface="Poppins"/>
                 <a:sym typeface="Poppins"/>
               </a:rPr>
-              <a:t>Users browse ava</a:t>
-            </a:r>
-            <a:r>
-              <a:rPr lang="en-US" sz="2499">
-                <a:solidFill>
-                  <a:srgbClr val="FFFFFF"/>
-                </a:solidFill>
-                <a:latin typeface="Poppins"/>
-                <a:ea typeface="Poppins"/>
-                <a:cs typeface="Poppins"/>
-                <a:sym typeface="Poppins"/>
-              </a:rPr>
-              <a:t>ilable sports fields through a simple web interface</a:t>
-            </a:r>
-          </a:p>
-        </p:txBody>
-      </p:sp>
-      <p:sp>
-        <p:nvSpPr>
-          <p:cNvPr name="Freeform 7" id="7"/>
+              <a:t>Users browse available sports fields through a simple web interface</a:t>
+            </a:r>
+          </a:p>
+        </p:txBody>
+      </p:sp>
+      <p:sp>
+        <p:nvSpPr>
+          <p:cNvPr id="7" name="Freeform 7"/>
           <p:cNvSpPr/>
           <p:nvPr/>
         </p:nvSpPr>
         <p:spPr>
-          <a:xfrm flipH="true" flipV="true" rot="0">
+          <a:xfrm flipH="1" flipV="1">
             <a:off x="15044313" y="0"/>
             <a:ext cx="3243687" cy="2522591"/>
           </a:xfrm>
@@ -5685,9 +4497,9 @@
             <a:gdLst/>
             <a:ahLst/>
             <a:cxnLst/>
-            <a:rect r="r" b="b" t="t" l="l"/>
+            <a:rect l="l" t="t" r="r" b="b"/>
             <a:pathLst>
-              <a:path h="2522591" w="3243687">
+              <a:path w="3243687" h="2522591">
                 <a:moveTo>
                   <a:pt x="3243687" y="2522591"/>
                 </a:moveTo>
@@ -5716,19 +4528,26 @@
               </a:extLst>
             </a:blip>
             <a:stretch>
-              <a:fillRect l="0" t="0" r="0" b="0"/>
+              <a:fillRect/>
             </a:stretch>
           </a:blipFill>
         </p:spPr>
-      </p:sp>
-      <p:sp>
-        <p:nvSpPr>
-          <p:cNvPr name="Freeform 8" id="8"/>
+        <p:txBody>
+          <a:bodyPr/>
+          <a:lstStyle/>
+          <a:p>
+            <a:endParaRPr lang="en-AE"/>
+          </a:p>
+        </p:txBody>
+      </p:sp>
+      <p:sp>
+        <p:nvSpPr>
+          <p:cNvPr id="8" name="Freeform 8"/>
           <p:cNvSpPr/>
           <p:nvPr/>
         </p:nvSpPr>
         <p:spPr>
-          <a:xfrm flipH="true" flipV="false" rot="0">
+          <a:xfrm flipH="1">
             <a:off x="0" y="7764409"/>
             <a:ext cx="3243687" cy="2522591"/>
           </a:xfrm>
@@ -5737,9 +4556,9 @@
             <a:gdLst/>
             <a:ahLst/>
             <a:cxnLst/>
-            <a:rect r="r" b="b" t="t" l="l"/>
+            <a:rect l="l" t="t" r="r" b="b"/>
             <a:pathLst>
-              <a:path h="2522591" w="3243687">
+              <a:path w="3243687" h="2522591">
                 <a:moveTo>
                   <a:pt x="3243687" y="0"/>
                 </a:moveTo>
@@ -5768,19 +4587,26 @@
               </a:extLst>
             </a:blip>
             <a:stretch>
-              <a:fillRect l="0" t="0" r="0" b="0"/>
+              <a:fillRect/>
             </a:stretch>
           </a:blipFill>
         </p:spPr>
+        <p:txBody>
+          <a:bodyPr/>
+          <a:lstStyle/>
+          <a:p>
+            <a:endParaRPr lang="en-AE"/>
+          </a:p>
+        </p:txBody>
       </p:sp>
       <p:grpSp>
         <p:nvGrpSpPr>
-          <p:cNvPr name="Group 9" id="9"/>
+          <p:cNvPr id="9" name="Group 9"/>
           <p:cNvGrpSpPr/>
           <p:nvPr/>
         </p:nvGrpSpPr>
         <p:grpSpPr>
-          <a:xfrm rot="0">
+          <a:xfrm>
             <a:off x="6862553" y="4514590"/>
             <a:ext cx="4562894" cy="1442531"/>
             <a:chOff x="0" y="0"/>
@@ -5789,12 +4615,12 @@
         </p:grpSpPr>
         <p:sp>
           <p:nvSpPr>
-            <p:cNvPr name="Freeform 10" id="10"/>
+            <p:cNvPr id="10" name="Freeform 10"/>
             <p:cNvSpPr/>
             <p:nvPr/>
           </p:nvSpPr>
           <p:spPr>
-            <a:xfrm flipH="false" flipV="false" rot="0">
+            <a:xfrm>
               <a:off x="0" y="0"/>
               <a:ext cx="1695573" cy="536045"/>
             </a:xfrm>
@@ -5803,9 +4629,9 @@
               <a:gdLst/>
               <a:ahLst/>
               <a:cxnLst/>
-              <a:rect r="r" b="b" t="t" l="l"/>
+              <a:rect l="l" t="t" r="r" b="b"/>
               <a:pathLst>
-                <a:path h="536045" w="1695573">
+                <a:path w="1695573" h="536045">
                   <a:moveTo>
                     <a:pt x="1492373" y="0"/>
                   </a:moveTo>
@@ -5844,11 +4670,18 @@
               <a:miter/>
             </a:ln>
           </p:spPr>
+          <p:txBody>
+            <a:bodyPr/>
+            <a:lstStyle/>
+            <a:p>
+              <a:endParaRPr lang="en-AE"/>
+            </a:p>
+          </p:txBody>
         </p:sp>
         <p:sp>
           <p:nvSpPr>
-            <p:cNvPr name="TextBox 11" id="11"/>
-            <p:cNvSpPr txBox="true"/>
+            <p:cNvPr id="11" name="TextBox 11"/>
+            <p:cNvSpPr txBox="1"/>
             <p:nvPr/>
           </p:nvSpPr>
           <p:spPr>
@@ -5861,7 +4694,7 @@
             </a:prstGeom>
           </p:spPr>
           <p:txBody>
-            <a:bodyPr anchor="ctr" rtlCol="false" tIns="50800" lIns="50800" bIns="50800" rIns="50800"/>
+            <a:bodyPr lIns="50800" tIns="50800" rIns="50800" bIns="50800" rtlCol="0" anchor="ctr"/>
             <a:lstStyle/>
             <a:p>
               <a:pPr algn="ctr">
@@ -5869,18 +4702,19 @@
                   <a:spcPts val="2659"/>
                 </a:lnSpc>
               </a:pPr>
+              <a:endParaRPr/>
             </a:p>
           </p:txBody>
         </p:sp>
       </p:grpSp>
       <p:sp>
         <p:nvSpPr>
-          <p:cNvPr name="TextBox 12" id="12"/>
-          <p:cNvSpPr txBox="true"/>
+          <p:cNvPr id="12" name="TextBox 12"/>
+          <p:cNvSpPr txBox="1"/>
           <p:nvPr/>
         </p:nvSpPr>
         <p:spPr>
-          <a:xfrm rot="0">
+          <a:xfrm>
             <a:off x="7073791" y="4543705"/>
             <a:ext cx="4140418" cy="1317625"/>
           </a:xfrm>
@@ -5889,7 +4723,7 @@
           </a:prstGeom>
         </p:spPr>
         <p:txBody>
-          <a:bodyPr anchor="t" rtlCol="false" tIns="0" lIns="0" bIns="0" rIns="0">
+          <a:bodyPr lIns="0" tIns="0" rIns="0" bIns="0" rtlCol="0" anchor="t">
             <a:spAutoFit/>
           </a:bodyPr>
           <a:lstStyle/>
@@ -5912,31 +4746,19 @@
                 <a:cs typeface="Poppins"/>
                 <a:sym typeface="Poppins"/>
               </a:rPr>
-              <a:t>Ava</a:t>
-            </a:r>
-            <a:r>
-              <a:rPr lang="en-US" sz="2499">
-                <a:solidFill>
-                  <a:srgbClr val="FFFFFF"/>
-                </a:solidFill>
-                <a:latin typeface="Poppins"/>
-                <a:ea typeface="Poppins"/>
-                <a:cs typeface="Poppins"/>
-                <a:sym typeface="Poppins"/>
-              </a:rPr>
-              <a:t>ilability is displayed automatically based on existing bookings</a:t>
+              <a:t>Availability is displayed automatically based on existing bookings</a:t>
             </a:r>
           </a:p>
         </p:txBody>
       </p:sp>
       <p:grpSp>
         <p:nvGrpSpPr>
-          <p:cNvPr name="Group 13" id="13"/>
+          <p:cNvPr id="13" name="Group 13"/>
           <p:cNvGrpSpPr/>
           <p:nvPr/>
         </p:nvGrpSpPr>
         <p:grpSpPr>
-          <a:xfrm rot="0">
+          <a:xfrm>
             <a:off x="11854072" y="4514590"/>
             <a:ext cx="4562894" cy="1442531"/>
             <a:chOff x="0" y="0"/>
@@ -5945,12 +4767,12 @@
         </p:grpSpPr>
         <p:sp>
           <p:nvSpPr>
-            <p:cNvPr name="Freeform 14" id="14"/>
+            <p:cNvPr id="14" name="Freeform 14"/>
             <p:cNvSpPr/>
             <p:nvPr/>
           </p:nvSpPr>
           <p:spPr>
-            <a:xfrm flipH="false" flipV="false" rot="0">
+            <a:xfrm>
               <a:off x="0" y="0"/>
               <a:ext cx="1695573" cy="536045"/>
             </a:xfrm>
@@ -5959,9 +4781,9 @@
               <a:gdLst/>
               <a:ahLst/>
               <a:cxnLst/>
-              <a:rect r="r" b="b" t="t" l="l"/>
+              <a:rect l="l" t="t" r="r" b="b"/>
               <a:pathLst>
-                <a:path h="536045" w="1695573">
+                <a:path w="1695573" h="536045">
                   <a:moveTo>
                     <a:pt x="1492373" y="0"/>
                   </a:moveTo>
@@ -6000,11 +4822,18 @@
               <a:miter/>
             </a:ln>
           </p:spPr>
+          <p:txBody>
+            <a:bodyPr/>
+            <a:lstStyle/>
+            <a:p>
+              <a:endParaRPr lang="en-AE"/>
+            </a:p>
+          </p:txBody>
         </p:sp>
         <p:sp>
           <p:nvSpPr>
-            <p:cNvPr name="TextBox 15" id="15"/>
-            <p:cNvSpPr txBox="true"/>
+            <p:cNvPr id="15" name="TextBox 15"/>
+            <p:cNvSpPr txBox="1"/>
             <p:nvPr/>
           </p:nvSpPr>
           <p:spPr>
@@ -6017,7 +4846,7 @@
             </a:prstGeom>
           </p:spPr>
           <p:txBody>
-            <a:bodyPr anchor="ctr" rtlCol="false" tIns="50800" lIns="50800" bIns="50800" rIns="50800"/>
+            <a:bodyPr lIns="50800" tIns="50800" rIns="50800" bIns="50800" rtlCol="0" anchor="ctr"/>
             <a:lstStyle/>
             <a:p>
               <a:pPr algn="ctr">
@@ -6025,18 +4854,19 @@
                   <a:spcPts val="2659"/>
                 </a:lnSpc>
               </a:pPr>
+              <a:endParaRPr/>
             </a:p>
           </p:txBody>
         </p:sp>
       </p:grpSp>
       <p:sp>
         <p:nvSpPr>
-          <p:cNvPr name="TextBox 16" id="16"/>
-          <p:cNvSpPr txBox="true"/>
+          <p:cNvPr id="16" name="TextBox 16"/>
+          <p:cNvSpPr txBox="1"/>
           <p:nvPr/>
         </p:nvSpPr>
         <p:spPr>
-          <a:xfrm rot="0">
+          <a:xfrm>
             <a:off x="12067141" y="4556589"/>
             <a:ext cx="4140418" cy="1317625"/>
           </a:xfrm>
@@ -6045,7 +4875,7 @@
           </a:prstGeom>
         </p:spPr>
         <p:txBody>
-          <a:bodyPr anchor="t" rtlCol="false" tIns="0" lIns="0" bIns="0" rIns="0">
+          <a:bodyPr lIns="0" tIns="0" rIns="0" bIns="0" rtlCol="0" anchor="t">
             <a:spAutoFit/>
           </a:bodyPr>
           <a:lstStyle/>
@@ -6068,31 +4898,19 @@
                 <a:cs typeface="Poppins"/>
                 <a:sym typeface="Poppins"/>
               </a:rPr>
-              <a:t>Users subm</a:t>
-            </a:r>
-            <a:r>
-              <a:rPr lang="en-US" sz="2499">
-                <a:solidFill>
-                  <a:srgbClr val="FFFFFF"/>
-                </a:solidFill>
-                <a:latin typeface="Poppins"/>
-                <a:ea typeface="Poppins"/>
-                <a:cs typeface="Poppins"/>
-                <a:sym typeface="Poppins"/>
-              </a:rPr>
-              <a:t>it booking requests with selected date and field</a:t>
+              <a:t>Users submit booking requests with selected date and field</a:t>
             </a:r>
           </a:p>
         </p:txBody>
       </p:sp>
       <p:grpSp>
         <p:nvGrpSpPr>
-          <p:cNvPr name="Group 17" id="17"/>
+          <p:cNvPr id="17" name="Group 17"/>
           <p:cNvGrpSpPr/>
           <p:nvPr/>
         </p:nvGrpSpPr>
         <p:grpSpPr>
-          <a:xfrm rot="0">
+          <a:xfrm>
             <a:off x="4191300" y="6182138"/>
             <a:ext cx="4562894" cy="1442531"/>
             <a:chOff x="0" y="0"/>
@@ -6101,12 +4919,12 @@
         </p:grpSpPr>
         <p:sp>
           <p:nvSpPr>
-            <p:cNvPr name="Freeform 18" id="18"/>
+            <p:cNvPr id="18" name="Freeform 18"/>
             <p:cNvSpPr/>
             <p:nvPr/>
           </p:nvSpPr>
           <p:spPr>
-            <a:xfrm flipH="false" flipV="false" rot="0">
+            <a:xfrm>
               <a:off x="0" y="0"/>
               <a:ext cx="1695573" cy="536045"/>
             </a:xfrm>
@@ -6115,9 +4933,9 @@
               <a:gdLst/>
               <a:ahLst/>
               <a:cxnLst/>
-              <a:rect r="r" b="b" t="t" l="l"/>
+              <a:rect l="l" t="t" r="r" b="b"/>
               <a:pathLst>
-                <a:path h="536045" w="1695573">
+                <a:path w="1695573" h="536045">
                   <a:moveTo>
                     <a:pt x="1492373" y="0"/>
                   </a:moveTo>
@@ -6156,11 +4974,18 @@
               <a:miter/>
             </a:ln>
           </p:spPr>
+          <p:txBody>
+            <a:bodyPr/>
+            <a:lstStyle/>
+            <a:p>
+              <a:endParaRPr lang="en-AE"/>
+            </a:p>
+          </p:txBody>
         </p:sp>
         <p:sp>
           <p:nvSpPr>
-            <p:cNvPr name="TextBox 19" id="19"/>
-            <p:cNvSpPr txBox="true"/>
+            <p:cNvPr id="19" name="TextBox 19"/>
+            <p:cNvSpPr txBox="1"/>
             <p:nvPr/>
           </p:nvSpPr>
           <p:spPr>
@@ -6173,7 +4998,7 @@
             </a:prstGeom>
           </p:spPr>
           <p:txBody>
-            <a:bodyPr anchor="ctr" rtlCol="false" tIns="50800" lIns="50800" bIns="50800" rIns="50800"/>
+            <a:bodyPr lIns="50800" tIns="50800" rIns="50800" bIns="50800" rtlCol="0" anchor="ctr"/>
             <a:lstStyle/>
             <a:p>
               <a:pPr algn="ctr">
@@ -6181,18 +5006,19 @@
                   <a:spcPts val="2659"/>
                 </a:lnSpc>
               </a:pPr>
+              <a:endParaRPr/>
             </a:p>
           </p:txBody>
         </p:sp>
       </p:grpSp>
       <p:sp>
         <p:nvSpPr>
-          <p:cNvPr name="TextBox 20" id="20"/>
-          <p:cNvSpPr txBox="true"/>
+          <p:cNvPr id="20" name="TextBox 20"/>
+          <p:cNvSpPr txBox="1"/>
           <p:nvPr/>
         </p:nvSpPr>
         <p:spPr>
-          <a:xfrm rot="0">
+          <a:xfrm>
             <a:off x="4402538" y="6211253"/>
             <a:ext cx="4140418" cy="1317625"/>
           </a:xfrm>
@@ -6201,7 +5027,7 @@
           </a:prstGeom>
         </p:spPr>
         <p:txBody>
-          <a:bodyPr anchor="t" rtlCol="false" tIns="0" lIns="0" bIns="0" rIns="0">
+          <a:bodyPr lIns="0" tIns="0" rIns="0" bIns="0" rtlCol="0" anchor="t">
             <a:spAutoFit/>
           </a:bodyPr>
           <a:lstStyle/>
@@ -6224,31 +5050,19 @@
                 <a:cs typeface="Poppins"/>
                 <a:sym typeface="Poppins"/>
               </a:rPr>
-              <a:t>The system va</a:t>
-            </a:r>
-            <a:r>
-              <a:rPr lang="en-US" sz="2499">
-                <a:solidFill>
-                  <a:srgbClr val="FFFFFF"/>
-                </a:solidFill>
-                <a:latin typeface="Poppins"/>
-                <a:ea typeface="Poppins"/>
-                <a:cs typeface="Poppins"/>
-                <a:sym typeface="Poppins"/>
-              </a:rPr>
-              <a:t>lidates requests and prevents basic conflicts</a:t>
+              <a:t>The system validates requests and prevents basic conflicts</a:t>
             </a:r>
           </a:p>
         </p:txBody>
       </p:sp>
       <p:grpSp>
         <p:nvGrpSpPr>
-          <p:cNvPr name="Group 21" id="21"/>
+          <p:cNvPr id="21" name="Group 21"/>
           <p:cNvGrpSpPr/>
           <p:nvPr/>
         </p:nvGrpSpPr>
         <p:grpSpPr>
-          <a:xfrm rot="0">
+          <a:xfrm>
             <a:off x="9533806" y="6182138"/>
             <a:ext cx="4562894" cy="1442531"/>
             <a:chOff x="0" y="0"/>
@@ -6257,12 +5071,12 @@
         </p:grpSpPr>
         <p:sp>
           <p:nvSpPr>
-            <p:cNvPr name="Freeform 22" id="22"/>
+            <p:cNvPr id="22" name="Freeform 22"/>
             <p:cNvSpPr/>
             <p:nvPr/>
           </p:nvSpPr>
           <p:spPr>
-            <a:xfrm flipH="false" flipV="false" rot="0">
+            <a:xfrm>
               <a:off x="0" y="0"/>
               <a:ext cx="1695573" cy="536045"/>
             </a:xfrm>
@@ -6271,9 +5085,9 @@
               <a:gdLst/>
               <a:ahLst/>
               <a:cxnLst/>
-              <a:rect r="r" b="b" t="t" l="l"/>
+              <a:rect l="l" t="t" r="r" b="b"/>
               <a:pathLst>
-                <a:path h="536045" w="1695573">
+                <a:path w="1695573" h="536045">
                   <a:moveTo>
                     <a:pt x="1492373" y="0"/>
                   </a:moveTo>
@@ -6312,11 +5126,18 @@
               <a:miter/>
             </a:ln>
           </p:spPr>
+          <p:txBody>
+            <a:bodyPr/>
+            <a:lstStyle/>
+            <a:p>
+              <a:endParaRPr lang="en-AE"/>
+            </a:p>
+          </p:txBody>
         </p:sp>
         <p:sp>
           <p:nvSpPr>
-            <p:cNvPr name="TextBox 23" id="23"/>
-            <p:cNvSpPr txBox="true"/>
+            <p:cNvPr id="23" name="TextBox 23"/>
+            <p:cNvSpPr txBox="1"/>
             <p:nvPr/>
           </p:nvSpPr>
           <p:spPr>
@@ -6329,7 +5150,7 @@
             </a:prstGeom>
           </p:spPr>
           <p:txBody>
-            <a:bodyPr anchor="ctr" rtlCol="false" tIns="50800" lIns="50800" bIns="50800" rIns="50800"/>
+            <a:bodyPr lIns="50800" tIns="50800" rIns="50800" bIns="50800" rtlCol="0" anchor="ctr"/>
             <a:lstStyle/>
             <a:p>
               <a:pPr algn="ctr">
@@ -6337,18 +5158,19 @@
                   <a:spcPts val="2659"/>
                 </a:lnSpc>
               </a:pPr>
+              <a:endParaRPr/>
             </a:p>
           </p:txBody>
         </p:sp>
       </p:grpSp>
       <p:sp>
         <p:nvSpPr>
-          <p:cNvPr name="TextBox 24" id="24"/>
-          <p:cNvSpPr txBox="true"/>
+          <p:cNvPr id="24" name="TextBox 24"/>
+          <p:cNvSpPr txBox="1"/>
           <p:nvPr/>
         </p:nvSpPr>
         <p:spPr>
-          <a:xfrm rot="0">
+          <a:xfrm>
             <a:off x="9745044" y="6211253"/>
             <a:ext cx="4140418" cy="1317625"/>
           </a:xfrm>
@@ -6357,7 +5179,7 @@
           </a:prstGeom>
         </p:spPr>
         <p:txBody>
-          <a:bodyPr anchor="t" rtlCol="false" tIns="0" lIns="0" bIns="0" rIns="0">
+          <a:bodyPr lIns="0" tIns="0" rIns="0" bIns="0" rtlCol="0" anchor="t">
             <a:spAutoFit/>
           </a:bodyPr>
           <a:lstStyle/>
@@ -6371,7 +5193,7 @@
               </a:spcBef>
             </a:pPr>
             <a:r>
-              <a:rPr lang="en-US" sz="2499">
+              <a:rPr lang="en-US" sz="2499" dirty="0">
                 <a:solidFill>
                   <a:srgbClr val="FFFFFF"/>
                 </a:solidFill>
@@ -6380,7 +5202,7 @@
                 <a:cs typeface="Poppins"/>
                 <a:sym typeface="Poppins"/>
               </a:rPr>
-              <a:t>Send confermation email to the user including date and time of the booking</a:t>
+              <a:t>Send confirmation email to the user including date and time of the booking</a:t>
             </a:r>
           </a:p>
         </p:txBody>

--- a/presentations/FIELD BOOKING SYSTEM (phase 1).pptx
+++ b/presentations/FIELD BOOKING SYSTEM (phase 1).pptx
@@ -319,7 +319,7 @@
             <a:fld id="{1D8BD707-D9CF-40AE-B4C6-C98DA3205C09}" type="datetimeFigureOut">
               <a:rPr lang="en-US" smtClean="0"/>
               <a:pPr/>
-              <a:t>2/5/2026</a:t>
+              <a:t>2/10/2026</a:t>
             </a:fld>
             <a:endParaRPr lang="en-US"/>
           </a:p>
@@ -484,7 +484,7 @@
             <a:fld id="{1D8BD707-D9CF-40AE-B4C6-C98DA3205C09}" type="datetimeFigureOut">
               <a:rPr lang="en-US" smtClean="0"/>
               <a:pPr/>
-              <a:t>2/5/2026</a:t>
+              <a:t>2/10/2026</a:t>
             </a:fld>
             <a:endParaRPr lang="en-US"/>
           </a:p>
@@ -659,7 +659,7 @@
             <a:fld id="{1D8BD707-D9CF-40AE-B4C6-C98DA3205C09}" type="datetimeFigureOut">
               <a:rPr lang="en-US" smtClean="0"/>
               <a:pPr/>
-              <a:t>2/5/2026</a:t>
+              <a:t>2/10/2026</a:t>
             </a:fld>
             <a:endParaRPr lang="en-US"/>
           </a:p>
@@ -824,7 +824,7 @@
             <a:fld id="{1D8BD707-D9CF-40AE-B4C6-C98DA3205C09}" type="datetimeFigureOut">
               <a:rPr lang="en-US" smtClean="0"/>
               <a:pPr/>
-              <a:t>2/5/2026</a:t>
+              <a:t>2/10/2026</a:t>
             </a:fld>
             <a:endParaRPr lang="en-US"/>
           </a:p>
@@ -1066,7 +1066,7 @@
             <a:fld id="{1D8BD707-D9CF-40AE-B4C6-C98DA3205C09}" type="datetimeFigureOut">
               <a:rPr lang="en-US" smtClean="0"/>
               <a:pPr/>
-              <a:t>2/5/2026</a:t>
+              <a:t>2/10/2026</a:t>
             </a:fld>
             <a:endParaRPr lang="en-US"/>
           </a:p>
@@ -1348,7 +1348,7 @@
             <a:fld id="{1D8BD707-D9CF-40AE-B4C6-C98DA3205C09}" type="datetimeFigureOut">
               <a:rPr lang="en-US" smtClean="0"/>
               <a:pPr/>
-              <a:t>2/5/2026</a:t>
+              <a:t>2/10/2026</a:t>
             </a:fld>
             <a:endParaRPr lang="en-US"/>
           </a:p>
@@ -1764,7 +1764,7 @@
             <a:fld id="{1D8BD707-D9CF-40AE-B4C6-C98DA3205C09}" type="datetimeFigureOut">
               <a:rPr lang="en-US" smtClean="0"/>
               <a:pPr/>
-              <a:t>2/5/2026</a:t>
+              <a:t>2/10/2026</a:t>
             </a:fld>
             <a:endParaRPr lang="en-US"/>
           </a:p>
@@ -1878,7 +1878,7 @@
             <a:fld id="{1D8BD707-D9CF-40AE-B4C6-C98DA3205C09}" type="datetimeFigureOut">
               <a:rPr lang="en-US" smtClean="0"/>
               <a:pPr/>
-              <a:t>2/5/2026</a:t>
+              <a:t>2/10/2026</a:t>
             </a:fld>
             <a:endParaRPr lang="en-US"/>
           </a:p>
@@ -1970,7 +1970,7 @@
             <a:fld id="{1D8BD707-D9CF-40AE-B4C6-C98DA3205C09}" type="datetimeFigureOut">
               <a:rPr lang="en-US" smtClean="0"/>
               <a:pPr/>
-              <a:t>2/5/2026</a:t>
+              <a:t>2/10/2026</a:t>
             </a:fld>
             <a:endParaRPr lang="en-US"/>
           </a:p>
@@ -2242,7 +2242,7 @@
             <a:fld id="{1D8BD707-D9CF-40AE-B4C6-C98DA3205C09}" type="datetimeFigureOut">
               <a:rPr lang="en-US" smtClean="0"/>
               <a:pPr/>
-              <a:t>2/5/2026</a:t>
+              <a:t>2/10/2026</a:t>
             </a:fld>
             <a:endParaRPr lang="en-US"/>
           </a:p>
@@ -2491,7 +2491,7 @@
             <a:fld id="{1D8BD707-D9CF-40AE-B4C6-C98DA3205C09}" type="datetimeFigureOut">
               <a:rPr lang="en-US" smtClean="0"/>
               <a:pPr/>
-              <a:t>2/5/2026</a:t>
+              <a:t>2/10/2026</a:t>
             </a:fld>
             <a:endParaRPr lang="en-US"/>
           </a:p>
@@ -2699,7 +2699,7 @@
             <a:fld id="{1D8BD707-D9CF-40AE-B4C6-C98DA3205C09}" type="datetimeFigureOut">
               <a:rPr lang="en-US" smtClean="0"/>
               <a:pPr/>
-              <a:t>2/5/2026</a:t>
+              <a:t>2/10/2026</a:t>
             </a:fld>
             <a:endParaRPr lang="en-US"/>
           </a:p>
@@ -3669,8 +3669,29 @@
                 <a:cs typeface="Poppins"/>
                 <a:sym typeface="Poppins"/>
               </a:rPr>
-              <a:t>Araz Hafez (433006927)</a:t>
-            </a:r>
+              <a:t>Araz </a:t>
+            </a:r>
+            <a:r>
+              <a:rPr lang="en-US" sz="2800">
+                <a:solidFill>
+                  <a:srgbClr val="FCC760"/>
+                </a:solidFill>
+                <a:latin typeface="Poppins"/>
+                <a:ea typeface="Poppins"/>
+                <a:cs typeface="Poppins"/>
+                <a:sym typeface="Poppins"/>
+              </a:rPr>
+              <a:t>Hafez (433006827)</a:t>
+            </a:r>
+            <a:endParaRPr lang="en-US" sz="2800" dirty="0">
+              <a:solidFill>
+                <a:srgbClr val="FCC760"/>
+              </a:solidFill>
+              <a:latin typeface="Poppins"/>
+              <a:ea typeface="Poppins"/>
+              <a:cs typeface="Poppins"/>
+              <a:sym typeface="Poppins"/>
+            </a:endParaRPr>
           </a:p>
           <a:p>
             <a:pPr algn="ctr">
